--- a/dist/초6/수학/입체와측정/초6_수학_입체와측정_01_각기둥과각뿔.pptx
+++ b/dist/초6/수학/입체와측정/초6_수학_입체와측정_01_각기둥과각뿔.pptx
@@ -122,13 +122,13 @@
   <p:extLst>
     <p:ext uri="{521415D9-36F7-43E2-AB2F-B90AF26B5E84}">
       <p14:sectionLst xmlns:p14="http://schemas.microsoft.com/office/powerpoint/2010/main">
-        <p14:section name="도입" id="{9abfb629-7d31-fe74-9e61-e0563cd93e6a}">
+        <p14:section name="도입" id="{9a0e0fcb-549d-8773-c80e-932200c58e93}">
           <p14:sldIdLst>
             <p14:sldId id="256"/>
             <p14:sldId id="257"/>
           </p14:sldIdLst>
         </p14:section>
-        <p14:section name="개념" id="{8223a5d0-7e9c-1ea2-96da-53bb79fd8e75}">
+        <p14:section name="개념" id="{097ebfaf-a09a-086a-4d85-8bdc7dd09311}">
           <p14:sldIdLst>
             <p14:sldId id="258"/>
             <p14:sldId id="259"/>
@@ -137,7 +137,7 @@
             <p14:sldId id="265"/>
           </p14:sldIdLst>
         </p14:section>
-        <p14:section name="연습" id="{04871d46-a9de-4d99-4121-3ee9992fec3c}">
+        <p14:section name="연습" id="{8823e70e-53af-4151-b00b-8aa39ee4169f}">
           <p14:sldIdLst>
             <p14:sldId id="261"/>
             <p14:sldId id="263"/>
@@ -145,31 +145,31 @@
             <p14:sldId id="266"/>
           </p14:sldIdLst>
         </p14:section>
-        <p14:section name="개념" id="{1ab7167d-e103-59bf-eea3-026fc710494f}">
+        <p14:section name="개념" id="{ede27749-b2de-60cb-0807-94a8e50b7b02}">
           <p14:sldIdLst/>
         </p14:section>
-        <p14:section name="연습" id="{4973d9e4-7e55-64d0-7559-63420400281d}">
+        <p14:section name="연습" id="{388bd692-222b-e184-55b1-a83b782b7438}">
           <p14:sldIdLst/>
         </p14:section>
-        <p14:section name="개념" id="{942754d9-21fd-307e-6a30-749415ca4e9a}">
+        <p14:section name="개념" id="{741534a8-3d4e-c559-1f9e-05dc2c5e18e7}">
           <p14:sldIdLst/>
         </p14:section>
-        <p14:section name="연습" id="{5462c0f8-2aa5-f167-7a22-62e6e1fe708e}">
+        <p14:section name="연습" id="{59bba022-d142-fcf1-6154-e405b5b1d32d}">
           <p14:sldIdLst/>
         </p14:section>
-        <p14:section name="확인" id="{6554377b-a43e-d63b-72c2-45986bc8cbd7}">
+        <p14:section name="확인" id="{79960d68-094a-84bd-1a99-a107cf46bd6e}">
           <p14:sldIdLst>
             <p14:sldId id="267"/>
             <p14:sldId id="268"/>
             <p14:sldId id="269"/>
           </p14:sldIdLst>
         </p14:section>
-        <p14:section name="정리" id="{f97ecdd8-bfed-fe04-c4ef-fb69851b4624}">
+        <p14:section name="정리" id="{51eb1a1c-1bee-aa39-4c77-eb94b05dfb4b}">
           <p14:sldIdLst>
             <p14:sldId id="270"/>
           </p14:sldIdLst>
         </p14:section>
-        <p14:section name="보충" id="{e0cdb737-674a-b576-b7d4-c48c043195a2}">
+        <p14:section name="보충" id="{503c759a-fdbd-6814-60ec-ddda9cc97ae7}">
           <p14:sldIdLst>
             <p14:sldId id="271"/>
           </p14:sldIdLst>
@@ -3755,7 +3755,7 @@
       </p:sp>
       <p:sp>
         <p:nvSpPr>
-          <p:cNvPr id="3" name="S10-mark175"/>
+          <p:cNvPr id="3" name="S10-mark153"/>
           <p:cNvSpPr/>
           <p:nvPr/>
         </p:nvSpPr>
@@ -3796,7 +3796,7 @@
       </p:sp>
       <p:sp>
         <p:nvSpPr>
-          <p:cNvPr id="4" name="S10-mark176"/>
+          <p:cNvPr id="4" name="S10-mark154"/>
           <p:cNvSpPr/>
           <p:nvPr/>
         </p:nvSpPr>
@@ -3837,7 +3837,7 @@
       </p:sp>
       <p:sp>
         <p:nvSpPr>
-          <p:cNvPr id="5" name="S10-mark177"/>
+          <p:cNvPr id="5" name="S10-mark155"/>
           <p:cNvSpPr/>
           <p:nvPr/>
         </p:nvSpPr>
@@ -3878,7 +3878,7 @@
       </p:sp>
       <p:sp>
         <p:nvSpPr>
-          <p:cNvPr id="6" name="S10-mark178"/>
+          <p:cNvPr id="6" name="S10-mark156"/>
           <p:cNvSpPr/>
           <p:nvPr/>
         </p:nvSpPr>
@@ -3916,7 +3916,7 @@
       </p:sp>
       <p:sp>
         <p:nvSpPr>
-          <p:cNvPr id="7" name="S10-mark179"/>
+          <p:cNvPr id="7" name="S10-mark157"/>
           <p:cNvSpPr/>
           <p:nvPr/>
         </p:nvSpPr>
@@ -3954,7 +3954,7 @@
       </p:sp>
       <p:sp>
         <p:nvSpPr>
-          <p:cNvPr id="8" name="S10-mark180"/>
+          <p:cNvPr id="8" name="S10-mark158"/>
           <p:cNvSpPr/>
           <p:nvPr/>
         </p:nvSpPr>
@@ -3977,7 +3977,7 @@
       </p:sp>
       <p:sp>
         <p:nvSpPr>
-          <p:cNvPr id="9" name="S10-mark181"/>
+          <p:cNvPr id="9" name="S10-mark159"/>
           <p:cNvSpPr/>
           <p:nvPr/>
         </p:nvSpPr>
@@ -4000,7 +4000,7 @@
       </p:sp>
       <p:sp>
         <p:nvSpPr>
-          <p:cNvPr id="10" name="S10-mark182"/>
+          <p:cNvPr id="10" name="S10-mark160"/>
           <p:cNvSpPr/>
           <p:nvPr/>
         </p:nvSpPr>
@@ -4023,7 +4023,7 @@
       </p:sp>
       <p:sp>
         <p:nvSpPr>
-          <p:cNvPr id="11" name="S10-mark183"/>
+          <p:cNvPr id="11" name="S10-mark161"/>
           <p:cNvSpPr/>
           <p:nvPr/>
         </p:nvSpPr>
@@ -4046,7 +4046,7 @@
       </p:sp>
       <p:sp>
         <p:nvSpPr>
-          <p:cNvPr id="12" name="S10-mark184"/>
+          <p:cNvPr id="12" name="S10-mark162"/>
           <p:cNvSpPr/>
           <p:nvPr/>
         </p:nvSpPr>
@@ -4069,7 +4069,7 @@
       </p:sp>
       <p:sp>
         <p:nvSpPr>
-          <p:cNvPr id="13" name="S10-mark185"/>
+          <p:cNvPr id="13" name="S10-mark163"/>
           <p:cNvSpPr/>
           <p:nvPr/>
         </p:nvSpPr>
@@ -4092,7 +4092,7 @@
       </p:sp>
       <p:sp>
         <p:nvSpPr>
-          <p:cNvPr id="14" name="S10-mark186"/>
+          <p:cNvPr id="14" name="S10-mark164"/>
           <p:cNvSpPr/>
           <p:nvPr/>
         </p:nvSpPr>
@@ -4115,7 +4115,7 @@
       </p:sp>
       <p:sp>
         <p:nvSpPr>
-          <p:cNvPr id="15" name="S10-mark187"/>
+          <p:cNvPr id="15" name="S10-mark165"/>
           <p:cNvSpPr/>
           <p:nvPr/>
         </p:nvSpPr>
@@ -4138,7 +4138,7 @@
       </p:sp>
       <p:sp>
         <p:nvSpPr>
-          <p:cNvPr id="16" name="S10-mark188"/>
+          <p:cNvPr id="16" name="S10-mark166"/>
           <p:cNvSpPr/>
           <p:nvPr/>
         </p:nvSpPr>
@@ -4161,7 +4161,7 @@
       </p:sp>
       <p:sp>
         <p:nvSpPr>
-          <p:cNvPr id="17" name="S10-mark189"/>
+          <p:cNvPr id="17" name="S10-mark167"/>
           <p:cNvSpPr/>
           <p:nvPr/>
         </p:nvSpPr>
@@ -4184,7 +4184,7 @@
       </p:sp>
       <p:sp>
         <p:nvSpPr>
-          <p:cNvPr id="18" name="S10-mark190"/>
+          <p:cNvPr id="18" name="S10-mark168"/>
           <p:cNvSpPr/>
           <p:nvPr/>
         </p:nvSpPr>
@@ -4207,7 +4207,7 @@
       </p:sp>
       <p:sp>
         <p:nvSpPr>
-          <p:cNvPr id="19" name="S10-mark191"/>
+          <p:cNvPr id="19" name="S10-mark169"/>
           <p:cNvSpPr/>
           <p:nvPr/>
         </p:nvSpPr>
@@ -4230,7 +4230,7 @@
       </p:sp>
       <p:sp>
         <p:nvSpPr>
-          <p:cNvPr id="20" name="S10-mark192"/>
+          <p:cNvPr id="20" name="S10-mark170"/>
           <p:cNvSpPr/>
           <p:nvPr/>
         </p:nvSpPr>
@@ -4253,7 +4253,7 @@
       </p:sp>
       <p:sp>
         <p:nvSpPr>
-          <p:cNvPr id="21" name="S10-mark193"/>
+          <p:cNvPr id="21" name="S10-mark171"/>
           <p:cNvSpPr/>
           <p:nvPr/>
         </p:nvSpPr>
@@ -4276,7 +4276,7 @@
       </p:sp>
       <p:sp>
         <p:nvSpPr>
-          <p:cNvPr id="22" name="S10-mark194"/>
+          <p:cNvPr id="22" name="S10-mark172"/>
           <p:cNvSpPr/>
           <p:nvPr/>
         </p:nvSpPr>
@@ -4299,7 +4299,7 @@
       </p:sp>
       <p:sp>
         <p:nvSpPr>
-          <p:cNvPr id="23" name="S10-mark195"/>
+          <p:cNvPr id="23" name="S10-mark173"/>
           <p:cNvSpPr/>
           <p:nvPr/>
         </p:nvSpPr>
@@ -4322,7 +4322,7 @@
       </p:sp>
       <p:sp>
         <p:nvSpPr>
-          <p:cNvPr id="24" name="S10-mark196"/>
+          <p:cNvPr id="24" name="S10-mark174"/>
           <p:cNvSpPr/>
           <p:nvPr/>
         </p:nvSpPr>
@@ -4345,7 +4345,7 @@
       </p:sp>
       <p:sp>
         <p:nvSpPr>
-          <p:cNvPr id="25" name="S10-mark197"/>
+          <p:cNvPr id="25" name="S10-mark175"/>
           <p:cNvSpPr/>
           <p:nvPr/>
         </p:nvSpPr>
@@ -4368,7 +4368,7 @@
       </p:sp>
       <p:sp>
         <p:nvSpPr>
-          <p:cNvPr id="26" name="S10-mark198"/>
+          <p:cNvPr id="26" name="S10-mark176"/>
           <p:cNvSpPr/>
           <p:nvPr/>
         </p:nvSpPr>
@@ -4391,7 +4391,7 @@
       </p:sp>
       <p:sp>
         <p:nvSpPr>
-          <p:cNvPr id="27" name="S10-mark199"/>
+          <p:cNvPr id="27" name="S10-mark177"/>
           <p:cNvSpPr/>
           <p:nvPr/>
         </p:nvSpPr>
@@ -4414,7 +4414,7 @@
       </p:sp>
       <p:sp>
         <p:nvSpPr>
-          <p:cNvPr id="28" name="S10-mark200"/>
+          <p:cNvPr id="28" name="S10-mark178"/>
           <p:cNvSpPr/>
           <p:nvPr/>
         </p:nvSpPr>
@@ -4437,7 +4437,7 @@
       </p:sp>
       <p:sp>
         <p:nvSpPr>
-          <p:cNvPr id="29" name="S10-mark201"/>
+          <p:cNvPr id="29" name="S10-mark179"/>
           <p:cNvSpPr/>
           <p:nvPr/>
         </p:nvSpPr>
@@ -4460,7 +4460,7 @@
       </p:sp>
       <p:sp>
         <p:nvSpPr>
-          <p:cNvPr id="30" name="S10-mark202"/>
+          <p:cNvPr id="30" name="S10-mark180"/>
           <p:cNvSpPr/>
           <p:nvPr/>
         </p:nvSpPr>
@@ -4483,7 +4483,7 @@
       </p:sp>
       <p:sp>
         <p:nvSpPr>
-          <p:cNvPr id="31" name="S10-mark203"/>
+          <p:cNvPr id="31" name="S10-mark181"/>
           <p:cNvSpPr/>
           <p:nvPr/>
         </p:nvSpPr>
@@ -4506,7 +4506,7 @@
       </p:sp>
       <p:sp>
         <p:nvSpPr>
-          <p:cNvPr id="32" name="S10-mark204"/>
+          <p:cNvPr id="32" name="S10-mark182"/>
           <p:cNvSpPr/>
           <p:nvPr/>
         </p:nvSpPr>
@@ -4529,7 +4529,7 @@
       </p:sp>
       <p:sp>
         <p:nvSpPr>
-          <p:cNvPr id="33" name="S10-mark205"/>
+          <p:cNvPr id="33" name="S10-mark183"/>
           <p:cNvSpPr/>
           <p:nvPr/>
         </p:nvSpPr>
@@ -4552,7 +4552,7 @@
       </p:sp>
       <p:sp>
         <p:nvSpPr>
-          <p:cNvPr id="34" name="S10-figure206" descr="모눈 위 삼각기둥의 전개도: 가로 3 cm, 4 cm, 5 cm, 세로 2 cm인 직사각형 옆면 3개와 그 위아래에 세 변이 3 cm, 4 cm, 5 cm인 삼각형 밑면 2개. 접으면 만나는 두 선분을 파랗게 표시"/>
+          <p:cNvPr id="34" name="S10-figure184" descr="모눈 위 삼각기둥의 전개도: 가로 3 cm, 4 cm, 5 cm, 세로 2 cm인 직사각형 옆면 3개와 그 위아래에 세 변이 3 cm, 4 cm, 5 cm인 삼각형 밑면 2개. 접으면 만나는 두 선분을 파랗게 표시"/>
           <p:cNvSpPr/>
           <p:nvPr/>
         </p:nvSpPr>
@@ -4596,7 +4596,7 @@
       </p:sp>
       <p:sp>
         <p:nvSpPr>
-          <p:cNvPr id="35" name="S10-mark207"/>
+          <p:cNvPr id="35" name="S10-mark185"/>
           <p:cNvSpPr/>
           <p:nvPr/>
         </p:nvSpPr>
@@ -4640,7 +4640,7 @@
       </p:sp>
       <p:sp>
         <p:nvSpPr>
-          <p:cNvPr id="36" name="S10-mark208"/>
+          <p:cNvPr id="36" name="S10-mark186"/>
           <p:cNvSpPr/>
           <p:nvPr/>
         </p:nvSpPr>
@@ -4684,7 +4684,7 @@
       </p:sp>
       <p:sp>
         <p:nvSpPr>
-          <p:cNvPr id="37" name="S10-mark209"/>
+          <p:cNvPr id="37" name="S10-mark187"/>
           <p:cNvSpPr/>
           <p:nvPr/>
         </p:nvSpPr>
@@ -4725,7 +4725,7 @@
       </p:sp>
       <p:sp>
         <p:nvSpPr>
-          <p:cNvPr id="38" name="S10-mark210"/>
+          <p:cNvPr id="38" name="S10-mark188"/>
           <p:cNvSpPr/>
           <p:nvPr/>
         </p:nvSpPr>
@@ -4766,7 +4766,7 @@
       </p:sp>
       <p:sp>
         <p:nvSpPr>
-          <p:cNvPr id="39" name="S10-mark211"/>
+          <p:cNvPr id="39" name="S10-mark189"/>
           <p:cNvSpPr/>
           <p:nvPr/>
         </p:nvSpPr>
@@ -4789,7 +4789,7 @@
       </p:sp>
       <p:sp>
         <p:nvSpPr>
-          <p:cNvPr id="40" name="S10-mark212"/>
+          <p:cNvPr id="40" name="S10-mark190"/>
           <p:cNvSpPr/>
           <p:nvPr/>
         </p:nvSpPr>
@@ -4812,7 +4812,7 @@
       </p:sp>
       <p:sp>
         <p:nvSpPr>
-          <p:cNvPr id="41" name="S10-label214"/>
+          <p:cNvPr id="41" name="S10-label192"/>
           <p:cNvSpPr txBox="1"/>
           <p:nvPr/>
         </p:nvSpPr>
@@ -4843,7 +4843,7 @@
                 <a:ea typeface="맑은 고딕" pitchFamily="34" charset="-122"/>
                 <a:cs typeface="맑은 고딕" pitchFamily="34" charset="-120"/>
               </a:rPr>
-              <a:t>3 cm</a:t>
+              <a:t>3 cm</a:t>
             </a:r>
             <a:endParaRPr lang="ko-KR" sz="2200" dirty="0"/>
           </a:p>
@@ -4851,13 +4851,13 @@
       </p:sp>
       <p:sp>
         <p:nvSpPr>
-          <p:cNvPr id="42" name="S10-label216"/>
+          <p:cNvPr id="42" name="S10-label194"/>
           <p:cNvSpPr txBox="1"/>
           <p:nvPr/>
         </p:nvSpPr>
         <p:spPr>
           <a:xfrm>
-            <a:off x="490064" y="3597275"/>
+            <a:off x="445360" y="3597275"/>
             <a:ext cx="763524" cy="349250"/>
           </a:xfrm>
           <a:prstGeom prst="rect">
@@ -4882,7 +4882,7 @@
                 <a:ea typeface="맑은 고딕" pitchFamily="34" charset="-122"/>
                 <a:cs typeface="맑은 고딕" pitchFamily="34" charset="-120"/>
               </a:rPr>
-              <a:t>2 cm</a:t>
+              <a:t>2 cm</a:t>
             </a:r>
             <a:endParaRPr lang="ko-KR" sz="2200" dirty="0"/>
           </a:p>
@@ -4890,13 +4890,13 @@
       </p:sp>
       <p:sp>
         <p:nvSpPr>
-          <p:cNvPr id="43" name="S10-label218"/>
+          <p:cNvPr id="43" name="S10-label196"/>
           <p:cNvSpPr txBox="1"/>
           <p:nvPr/>
         </p:nvSpPr>
         <p:spPr>
           <a:xfrm>
-            <a:off x="2743026" y="4222213"/>
+            <a:off x="4423677" y="4222213"/>
             <a:ext cx="763524" cy="349250"/>
           </a:xfrm>
           <a:prstGeom prst="rect">
@@ -4921,7 +4921,7 @@
                 <a:ea typeface="맑은 고딕" pitchFamily="34" charset="-122"/>
                 <a:cs typeface="맑은 고딕" pitchFamily="34" charset="-120"/>
               </a:rPr>
-              <a:t>4 cm</a:t>
+              <a:t>5 cm</a:t>
             </a:r>
             <a:endParaRPr lang="ko-KR" sz="2200" dirty="0"/>
           </a:p>
@@ -4929,13 +4929,13 @@
       </p:sp>
       <p:sp>
         <p:nvSpPr>
-          <p:cNvPr id="44" name="S10-label220"/>
+          <p:cNvPr id="44" name="S10-label198"/>
           <p:cNvSpPr txBox="1"/>
           <p:nvPr/>
         </p:nvSpPr>
         <p:spPr>
           <a:xfrm>
-            <a:off x="4423677" y="4222213"/>
+            <a:off x="2743026" y="3597275"/>
             <a:ext cx="763524" cy="349250"/>
           </a:xfrm>
           <a:prstGeom prst="rect">
@@ -4960,7 +4960,7 @@
                 <a:ea typeface="맑은 고딕" pitchFamily="34" charset="-122"/>
                 <a:cs typeface="맑은 고딕" pitchFamily="34" charset="-120"/>
               </a:rPr>
-              <a:t>5 cm</a:t>
+              <a:t>4 cm</a:t>
             </a:r>
             <a:endParaRPr lang="ko-KR" sz="2200" dirty="0"/>
           </a:p>
@@ -4968,7 +4968,7 @@
       </p:sp>
       <p:sp>
         <p:nvSpPr>
-          <p:cNvPr id="45" name="S10-card221"/>
+          <p:cNvPr id="45" name="S10-card199"/>
           <p:cNvSpPr/>
           <p:nvPr/>
         </p:nvSpPr>
@@ -4995,7 +4995,7 @@
       </p:sp>
       <p:sp>
         <p:nvSpPr>
-          <p:cNvPr id="46" name="S10-cardtext222"/>
+          <p:cNvPr id="46" name="S10-cardtext200"/>
           <p:cNvSpPr txBox="1"/>
           <p:nvPr/>
         </p:nvSpPr>
@@ -5057,7 +5057,7 @@
       </p:sp>
       <p:sp>
         <p:nvSpPr>
-          <p:cNvPr id="47" name="S10-card223"/>
+          <p:cNvPr id="47" name="S10-card201"/>
           <p:cNvSpPr/>
           <p:nvPr/>
         </p:nvSpPr>
@@ -5084,7 +5084,7 @@
       </p:sp>
       <p:sp>
         <p:nvSpPr>
-          <p:cNvPr id="48" name="S10-cardtext224"/>
+          <p:cNvPr id="48" name="S10-cardtext202"/>
           <p:cNvSpPr txBox="1"/>
           <p:nvPr/>
         </p:nvSpPr>
@@ -5158,7 +5158,7 @@
                 <a:ea typeface="맑은 고딕" pitchFamily="34" charset="-122"/>
                 <a:cs typeface="맑은 고딕" pitchFamily="34" charset="-120"/>
               </a:rPr>
-              <a:t>(높이 2 cm)</a:t>
+              <a:t>(높이 2 cm)</a:t>
             </a:r>
             <a:endParaRPr lang="ko-KR" sz="2800" dirty="0"/>
           </a:p>
@@ -5166,7 +5166,7 @@
       </p:sp>
       <p:sp>
         <p:nvSpPr>
-          <p:cNvPr id="49" name="S10-card225"/>
+          <p:cNvPr id="49" name="S10-card203"/>
           <p:cNvSpPr/>
           <p:nvPr/>
         </p:nvSpPr>
@@ -5193,7 +5193,7 @@
       </p:sp>
       <p:sp>
         <p:nvSpPr>
-          <p:cNvPr id="50" name="S10-cardtext226"/>
+          <p:cNvPr id="50" name="S10-cardtext204"/>
           <p:cNvSpPr txBox="1"/>
           <p:nvPr/>
         </p:nvSpPr>
@@ -5389,7 +5389,7 @@
       </p:sp>
       <p:sp>
         <p:nvSpPr>
-          <p:cNvPr id="3" name="S11-card227"/>
+          <p:cNvPr id="3" name="S11-card205"/>
           <p:cNvSpPr/>
           <p:nvPr/>
         </p:nvSpPr>
@@ -5416,7 +5416,7 @@
       </p:sp>
       <p:sp>
         <p:nvSpPr>
-          <p:cNvPr id="4" name="S11-cardtext228"/>
+          <p:cNvPr id="4" name="S11-cardtext206"/>
           <p:cNvSpPr txBox="1"/>
           <p:nvPr/>
         </p:nvSpPr>
@@ -5458,7 +5458,7 @@
       </p:sp>
       <p:sp>
         <p:nvSpPr>
-          <p:cNvPr id="5" name="S11-chip229"/>
+          <p:cNvPr id="5" name="S11-chip207"/>
           <p:cNvSpPr txBox="1"/>
           <p:nvPr/>
         </p:nvSpPr>
@@ -5505,7 +5505,7 @@
       </p:sp>
       <p:sp>
         <p:nvSpPr>
-          <p:cNvPr id="6" name="S11-figure230" descr="가: 밑면 두 개가 가운데 옆면의 위와 아래에 붙은 전개도"/>
+          <p:cNvPr id="6" name="S11-figure208" descr="가: 밑면 두 개가 가운데 옆면의 위와 아래에 붙은 전개도"/>
           <p:cNvSpPr/>
           <p:nvPr/>
         </p:nvSpPr>
@@ -5551,7 +5551,7 @@
       </p:sp>
       <p:sp>
         <p:nvSpPr>
-          <p:cNvPr id="7" name="S11-mark231"/>
+          <p:cNvPr id="7" name="S11-mark209"/>
           <p:cNvSpPr/>
           <p:nvPr/>
         </p:nvSpPr>
@@ -5597,7 +5597,7 @@
       </p:sp>
       <p:sp>
         <p:nvSpPr>
-          <p:cNvPr id="8" name="S11-mark232"/>
+          <p:cNvPr id="8" name="S11-mark210"/>
           <p:cNvSpPr/>
           <p:nvPr/>
         </p:nvSpPr>
@@ -5643,7 +5643,7 @@
       </p:sp>
       <p:sp>
         <p:nvSpPr>
-          <p:cNvPr id="9" name="S11-mark233"/>
+          <p:cNvPr id="9" name="S11-mark211"/>
           <p:cNvSpPr/>
           <p:nvPr/>
         </p:nvSpPr>
@@ -5686,7 +5686,7 @@
       </p:sp>
       <p:sp>
         <p:nvSpPr>
-          <p:cNvPr id="10" name="S11-mark234"/>
+          <p:cNvPr id="10" name="S11-mark212"/>
           <p:cNvSpPr/>
           <p:nvPr/>
         </p:nvSpPr>
@@ -5729,7 +5729,7 @@
       </p:sp>
       <p:sp>
         <p:nvSpPr>
-          <p:cNvPr id="11" name="S11-chip235"/>
+          <p:cNvPr id="11" name="S11-chip213"/>
           <p:cNvSpPr txBox="1"/>
           <p:nvPr/>
         </p:nvSpPr>
@@ -5776,7 +5776,7 @@
       </p:sp>
       <p:sp>
         <p:nvSpPr>
-          <p:cNvPr id="12" name="S11-figure236" descr="나: 밑면 두 개가 모두 옆면들의 위쪽에 붙은 그림"/>
+          <p:cNvPr id="12" name="S11-figure214" descr="나: 밑면 두 개가 모두 옆면들의 위쪽에 붙은 그림"/>
           <p:cNvSpPr/>
           <p:nvPr/>
         </p:nvSpPr>
@@ -5822,7 +5822,7 @@
       </p:sp>
       <p:sp>
         <p:nvSpPr>
-          <p:cNvPr id="13" name="S11-mark237"/>
+          <p:cNvPr id="13" name="S11-mark215"/>
           <p:cNvSpPr/>
           <p:nvPr/>
         </p:nvSpPr>
@@ -5868,7 +5868,7 @@
       </p:sp>
       <p:sp>
         <p:nvSpPr>
-          <p:cNvPr id="14" name="S11-mark238"/>
+          <p:cNvPr id="14" name="S11-mark216"/>
           <p:cNvSpPr/>
           <p:nvPr/>
         </p:nvSpPr>
@@ -5914,7 +5914,7 @@
       </p:sp>
       <p:sp>
         <p:nvSpPr>
-          <p:cNvPr id="15" name="S11-mark239"/>
+          <p:cNvPr id="15" name="S11-mark217"/>
           <p:cNvSpPr/>
           <p:nvPr/>
         </p:nvSpPr>
@@ -5957,14 +5957,14 @@
       </p:sp>
       <p:sp>
         <p:nvSpPr>
-          <p:cNvPr id="16" name="S11-mark240"/>
-          <p:cNvSpPr/>
-          <p:nvPr/>
-        </p:nvSpPr>
-        <p:spPr>
-          <a:xfrm>
-            <a:off x="5273040" y="3027680"/>
-            <a:ext cx="1095248" cy="821436"/>
+          <p:cNvPr id="16" name="S11-mark218"/>
+          <p:cNvSpPr/>
+          <p:nvPr/>
+        </p:nvSpPr>
+        <p:spPr>
+          <a:xfrm>
+            <a:off x="6368288" y="3191967"/>
+            <a:ext cx="1369060" cy="657149"/>
           </a:xfrm>
           <a:custGeom>
             <a:avLst/>
@@ -5973,15 +5973,15 @@
             <a:cxnLst/>
             <a:rect l="l" t="t" r="r" b="b"/>
             <a:pathLst>
-              <a:path w="1095248" h="821436">
+              <a:path w="1369060" h="657149">
                 <a:moveTo>
-                  <a:pt x="0" y="821436"/>
+                  <a:pt x="0" y="657149"/>
                 </a:moveTo>
                 <a:lnTo>
-                  <a:pt x="1095248" y="821436"/>
+                  <a:pt x="1369060" y="657149"/>
                 </a:lnTo>
                 <a:lnTo>
-                  <a:pt x="0" y="0"/>
+                  <a:pt x="876198" y="0"/>
                 </a:lnTo>
                 <a:close/>
               </a:path>
@@ -6000,7 +6000,7 @@
       </p:sp>
       <p:sp>
         <p:nvSpPr>
-          <p:cNvPr id="17" name="S11-chip241"/>
+          <p:cNvPr id="17" name="S11-chip219"/>
           <p:cNvSpPr txBox="1"/>
           <p:nvPr/>
         </p:nvSpPr>
@@ -6047,7 +6047,7 @@
       </p:sp>
       <p:sp>
         <p:nvSpPr>
-          <p:cNvPr id="18" name="S11-figure242" descr="다: 밑면 하나는 왼쪽 옆면 위에, 하나는 가운데 옆면 아래에 붙은 전개도"/>
+          <p:cNvPr id="18" name="S11-figure220" descr="다: 밑면 하나는 왼쪽 옆면 위에, 하나는 가운데 옆면 아래에 붙은 전개도"/>
           <p:cNvSpPr/>
           <p:nvPr/>
         </p:nvSpPr>
@@ -6093,7 +6093,7 @@
       </p:sp>
       <p:sp>
         <p:nvSpPr>
-          <p:cNvPr id="19" name="S11-mark243"/>
+          <p:cNvPr id="19" name="S11-mark221"/>
           <p:cNvSpPr/>
           <p:nvPr/>
         </p:nvSpPr>
@@ -6139,7 +6139,7 @@
       </p:sp>
       <p:sp>
         <p:nvSpPr>
-          <p:cNvPr id="20" name="S11-mark244"/>
+          <p:cNvPr id="20" name="S11-mark222"/>
           <p:cNvSpPr/>
           <p:nvPr/>
         </p:nvSpPr>
@@ -6185,7 +6185,7 @@
       </p:sp>
       <p:sp>
         <p:nvSpPr>
-          <p:cNvPr id="21" name="S11-mark245"/>
+          <p:cNvPr id="21" name="S11-mark223"/>
           <p:cNvSpPr/>
           <p:nvPr/>
         </p:nvSpPr>
@@ -6228,7 +6228,7 @@
       </p:sp>
       <p:sp>
         <p:nvSpPr>
-          <p:cNvPr id="22" name="S11-mark246"/>
+          <p:cNvPr id="22" name="S11-mark224"/>
           <p:cNvSpPr/>
           <p:nvPr/>
         </p:nvSpPr>
@@ -6385,7 +6385,7 @@
       </p:sp>
       <p:sp>
         <p:nvSpPr>
-          <p:cNvPr id="3" name="S12-figure247" descr="삼각기둥의 전개도: 옆면의 가로 3 cm, 4 cm, □ cm, 밑면 삼각형의 한 변 5 cm"/>
+          <p:cNvPr id="3" name="S12-figure225" descr="삼각기둥의 전개도: 옆면의 가로 3 cm, 4 cm, □ cm, 밑면 삼각형의 한 변 5 cm"/>
           <p:cNvSpPr/>
           <p:nvPr/>
         </p:nvSpPr>
@@ -6431,7 +6431,7 @@
       </p:sp>
       <p:sp>
         <p:nvSpPr>
-          <p:cNvPr id="4" name="S12-mark248"/>
+          <p:cNvPr id="4" name="S12-mark226"/>
           <p:cNvSpPr/>
           <p:nvPr/>
         </p:nvSpPr>
@@ -6477,7 +6477,7 @@
       </p:sp>
       <p:sp>
         <p:nvSpPr>
-          <p:cNvPr id="5" name="S12-mark249"/>
+          <p:cNvPr id="5" name="S12-mark227"/>
           <p:cNvSpPr/>
           <p:nvPr/>
         </p:nvSpPr>
@@ -6523,7 +6523,7 @@
       </p:sp>
       <p:sp>
         <p:nvSpPr>
-          <p:cNvPr id="6" name="S12-mark250"/>
+          <p:cNvPr id="6" name="S12-mark228"/>
           <p:cNvSpPr/>
           <p:nvPr/>
         </p:nvSpPr>
@@ -6566,7 +6566,7 @@
       </p:sp>
       <p:sp>
         <p:nvSpPr>
-          <p:cNvPr id="7" name="S12-mark251"/>
+          <p:cNvPr id="7" name="S12-mark229"/>
           <p:cNvSpPr/>
           <p:nvPr/>
         </p:nvSpPr>
@@ -6609,7 +6609,7 @@
       </p:sp>
       <p:sp>
         <p:nvSpPr>
-          <p:cNvPr id="8" name="S12-label253"/>
+          <p:cNvPr id="8" name="S12-label231"/>
           <p:cNvSpPr txBox="1"/>
           <p:nvPr/>
         </p:nvSpPr>
@@ -6640,7 +6640,7 @@
                 <a:ea typeface="맑은 고딕" pitchFamily="34" charset="-122"/>
                 <a:cs typeface="맑은 고딕" pitchFamily="34" charset="-120"/>
               </a:rPr>
-              <a:t>3 cm</a:t>
+              <a:t>3 cm</a:t>
             </a:r>
             <a:endParaRPr lang="ko-KR" sz="2200" dirty="0"/>
           </a:p>
@@ -6648,13 +6648,13 @@
       </p:sp>
       <p:sp>
         <p:nvSpPr>
-          <p:cNvPr id="9" name="S12-label255"/>
+          <p:cNvPr id="9" name="S12-label233"/>
           <p:cNvSpPr txBox="1"/>
           <p:nvPr/>
         </p:nvSpPr>
         <p:spPr>
           <a:xfrm>
-            <a:off x="8186039" y="4630801"/>
+            <a:off x="8186039" y="2954782"/>
             <a:ext cx="763524" cy="349250"/>
           </a:xfrm>
           <a:prstGeom prst="rect">
@@ -6679,7 +6679,7 @@
                 <a:ea typeface="맑은 고딕" pitchFamily="34" charset="-122"/>
                 <a:cs typeface="맑은 고딕" pitchFamily="34" charset="-120"/>
               </a:rPr>
-              <a:t>4 cm</a:t>
+              <a:t>4 cm</a:t>
             </a:r>
             <a:endParaRPr lang="ko-KR" sz="2200" dirty="0"/>
           </a:p>
@@ -6687,7 +6687,7 @@
       </p:sp>
       <p:sp>
         <p:nvSpPr>
-          <p:cNvPr id="10" name="S12-label257"/>
+          <p:cNvPr id="10" name="S12-label235"/>
           <p:cNvSpPr txBox="1"/>
           <p:nvPr/>
         </p:nvSpPr>
@@ -6726,13 +6726,13 @@
       </p:sp>
       <p:sp>
         <p:nvSpPr>
-          <p:cNvPr id="11" name="S12-label259"/>
+          <p:cNvPr id="11" name="S12-label237"/>
           <p:cNvSpPr txBox="1"/>
           <p:nvPr/>
         </p:nvSpPr>
         <p:spPr>
           <a:xfrm>
-            <a:off x="6476779" y="2168693"/>
+            <a:off x="6448168" y="2147235"/>
             <a:ext cx="763524" cy="349250"/>
           </a:xfrm>
           <a:prstGeom prst="rect">
@@ -6757,7 +6757,7 @@
                 <a:ea typeface="맑은 고딕" pitchFamily="34" charset="-122"/>
                 <a:cs typeface="맑은 고딕" pitchFamily="34" charset="-120"/>
               </a:rPr>
-              <a:t>5 cm</a:t>
+              <a:t>5 cm</a:t>
             </a:r>
             <a:endParaRPr lang="ko-KR" sz="2200" dirty="0"/>
           </a:p>
@@ -6765,7 +6765,7 @@
       </p:sp>
       <p:sp>
         <p:nvSpPr>
-          <p:cNvPr id="12" name="S12-chip260"/>
+          <p:cNvPr id="12" name="S12-chip238"/>
           <p:cNvSpPr txBox="1"/>
           <p:nvPr/>
         </p:nvSpPr>
@@ -6812,7 +6812,7 @@
       </p:sp>
       <p:sp>
         <p:nvSpPr>
-          <p:cNvPr id="13" name="S12-text261"/>
+          <p:cNvPr id="13" name="S12-text239"/>
           <p:cNvSpPr txBox="1"/>
           <p:nvPr/>
         </p:nvSpPr>
@@ -6868,7 +6868,7 @@
       </p:sp>
       <p:sp>
         <p:nvSpPr>
-          <p:cNvPr id="14" name="S12-chip262"/>
+          <p:cNvPr id="14" name="S12-chip240"/>
           <p:cNvSpPr txBox="1"/>
           <p:nvPr/>
         </p:nvSpPr>
@@ -6915,7 +6915,7 @@
       </p:sp>
       <p:sp>
         <p:nvSpPr>
-          <p:cNvPr id="15" name="S12-text263"/>
+          <p:cNvPr id="15" name="S12-text241"/>
           <p:cNvSpPr txBox="1"/>
           <p:nvPr/>
         </p:nvSpPr>
@@ -6971,7 +6971,7 @@
       </p:sp>
       <p:sp>
         <p:nvSpPr>
-          <p:cNvPr id="16" name="S12-chip264"/>
+          <p:cNvPr id="16" name="S12-chip242"/>
           <p:cNvSpPr txBox="1"/>
           <p:nvPr/>
         </p:nvSpPr>
@@ -7018,7 +7018,7 @@
       </p:sp>
       <p:sp>
         <p:nvSpPr>
-          <p:cNvPr id="17" name="S12-text265"/>
+          <p:cNvPr id="17" name="S12-text243"/>
           <p:cNvSpPr txBox="1"/>
           <p:nvPr/>
         </p:nvSpPr>
@@ -7074,7 +7074,7 @@
       </p:sp>
       <p:sp>
         <p:nvSpPr>
-          <p:cNvPr id="18" name="S12-chip266"/>
+          <p:cNvPr id="18" name="S12-chip244"/>
           <p:cNvSpPr txBox="1"/>
           <p:nvPr/>
         </p:nvSpPr>
@@ -7121,7 +7121,7 @@
       </p:sp>
       <p:sp>
         <p:nvSpPr>
-          <p:cNvPr id="19" name="S12-text267"/>
+          <p:cNvPr id="19" name="S12-text245"/>
           <p:cNvSpPr txBox="1"/>
           <p:nvPr/>
         </p:nvSpPr>
@@ -7274,7 +7274,7 @@
       </p:sp>
       <p:sp>
         <p:nvSpPr>
-          <p:cNvPr id="3" name="S13-card268"/>
+          <p:cNvPr id="3" name="S13-card246"/>
           <p:cNvSpPr/>
           <p:nvPr/>
         </p:nvSpPr>
@@ -7301,7 +7301,7 @@
       </p:sp>
       <p:sp>
         <p:nvSpPr>
-          <p:cNvPr id="4" name="S13-cardtext269"/>
+          <p:cNvPr id="4" name="S13-cardtext247"/>
           <p:cNvSpPr txBox="1"/>
           <p:nvPr/>
         </p:nvSpPr>
@@ -7343,7 +7343,7 @@
       </p:sp>
       <p:sp>
         <p:nvSpPr>
-          <p:cNvPr id="5" name="S13-chip270"/>
+          <p:cNvPr id="5" name="S13-chip248"/>
           <p:cNvSpPr txBox="1"/>
           <p:nvPr/>
         </p:nvSpPr>
@@ -7390,7 +7390,7 @@
       </p:sp>
       <p:sp>
         <p:nvSpPr>
-          <p:cNvPr id="6" name="S13-text271"/>
+          <p:cNvPr id="6" name="S13-text249"/>
           <p:cNvSpPr txBox="1"/>
           <p:nvPr/>
         </p:nvSpPr>
@@ -7429,7 +7429,7 @@
       </p:sp>
       <p:sp>
         <p:nvSpPr>
-          <p:cNvPr id="7" name="S13-text272"/>
+          <p:cNvPr id="7" name="S13-text250"/>
           <p:cNvSpPr txBox="1"/>
           <p:nvPr/>
         </p:nvSpPr>
@@ -7468,7 +7468,7 @@
       </p:sp>
       <p:sp>
         <p:nvSpPr>
-          <p:cNvPr id="8" name="S13-text273"/>
+          <p:cNvPr id="8" name="S13-text251"/>
           <p:cNvSpPr txBox="1"/>
           <p:nvPr/>
         </p:nvSpPr>
@@ -7507,7 +7507,7 @@
       </p:sp>
       <p:sp>
         <p:nvSpPr>
-          <p:cNvPr id="9" name="S13-text274"/>
+          <p:cNvPr id="9" name="S13-text252"/>
           <p:cNvSpPr txBox="1"/>
           <p:nvPr/>
         </p:nvSpPr>
@@ -7546,7 +7546,7 @@
       </p:sp>
       <p:sp>
         <p:nvSpPr>
-          <p:cNvPr id="10" name="S13-text275"/>
+          <p:cNvPr id="10" name="S13-text253"/>
           <p:cNvSpPr txBox="1"/>
           <p:nvPr/>
         </p:nvSpPr>
@@ -7585,7 +7585,7 @@
       </p:sp>
       <p:sp>
         <p:nvSpPr>
-          <p:cNvPr id="11" name="S13-text276"/>
+          <p:cNvPr id="11" name="S13-text254"/>
           <p:cNvSpPr txBox="1"/>
           <p:nvPr/>
         </p:nvSpPr>
@@ -7624,7 +7624,7 @@
       </p:sp>
       <p:sp>
         <p:nvSpPr>
-          <p:cNvPr id="12" name="S13-text277"/>
+          <p:cNvPr id="12" name="S13-text255"/>
           <p:cNvSpPr txBox="1"/>
           <p:nvPr/>
         </p:nvSpPr>
@@ -7655,7 +7655,7 @@
                 <a:ea typeface="맑은 고딕" pitchFamily="34" charset="-122"/>
                 <a:cs typeface="맑은 고딕" pitchFamily="34" charset="-120"/>
               </a:rPr>
-              <a:t>④ 5 cm</a:t>
+              <a:t>④ 5 cm</a:t>
             </a:r>
             <a:endParaRPr lang="ko-KR" sz="2800" dirty="0"/>
           </a:p>
@@ -7663,7 +7663,7 @@
       </p:sp>
       <p:sp>
         <p:nvSpPr>
-          <p:cNvPr id="13" name="S13-text278"/>
+          <p:cNvPr id="13" name="S13-text256"/>
           <p:cNvSpPr txBox="1"/>
           <p:nvPr/>
         </p:nvSpPr>
@@ -7702,7 +7702,7 @@
       </p:sp>
       <p:sp>
         <p:nvSpPr>
-          <p:cNvPr id="14" name="S13-chip279"/>
+          <p:cNvPr id="14" name="S13-chip257"/>
           <p:cNvSpPr txBox="1"/>
           <p:nvPr/>
         </p:nvSpPr>
@@ -7749,7 +7749,7 @@
       </p:sp>
       <p:sp>
         <p:nvSpPr>
-          <p:cNvPr id="15" name="S13-text280"/>
+          <p:cNvPr id="15" name="S13-text258"/>
           <p:cNvSpPr txBox="1"/>
           <p:nvPr/>
         </p:nvSpPr>
@@ -7788,7 +7788,7 @@
       </p:sp>
       <p:sp>
         <p:nvSpPr>
-          <p:cNvPr id="16" name="S13-text281"/>
+          <p:cNvPr id="16" name="S13-text259"/>
           <p:cNvSpPr txBox="1"/>
           <p:nvPr/>
         </p:nvSpPr>
@@ -7827,7 +7827,7 @@
       </p:sp>
       <p:sp>
         <p:nvSpPr>
-          <p:cNvPr id="17" name="S13-text282"/>
+          <p:cNvPr id="17" name="S13-text260"/>
           <p:cNvSpPr txBox="1"/>
           <p:nvPr/>
         </p:nvSpPr>
@@ -7866,7 +7866,7 @@
       </p:sp>
       <p:sp>
         <p:nvSpPr>
-          <p:cNvPr id="18" name="S13-text283"/>
+          <p:cNvPr id="18" name="S13-text261"/>
           <p:cNvSpPr txBox="1"/>
           <p:nvPr/>
         </p:nvSpPr>
@@ -8019,7 +8019,7 @@
       </p:sp>
       <p:sp>
         <p:nvSpPr>
-          <p:cNvPr id="3" name="S14-card284"/>
+          <p:cNvPr id="3" name="S14-card262"/>
           <p:cNvSpPr/>
           <p:nvPr/>
         </p:nvSpPr>
@@ -8046,7 +8046,7 @@
       </p:sp>
       <p:sp>
         <p:nvSpPr>
-          <p:cNvPr id="4" name="S14-cardtext285"/>
+          <p:cNvPr id="4" name="S14-cardtext263"/>
           <p:cNvSpPr txBox="1"/>
           <p:nvPr/>
         </p:nvSpPr>
@@ -8088,7 +8088,7 @@
       </p:sp>
       <p:sp>
         <p:nvSpPr>
-          <p:cNvPr id="5" name="S14-chip286"/>
+          <p:cNvPr id="5" name="S14-chip264"/>
           <p:cNvSpPr txBox="1"/>
           <p:nvPr/>
         </p:nvSpPr>
@@ -8135,7 +8135,7 @@
       </p:sp>
       <p:sp>
         <p:nvSpPr>
-          <p:cNvPr id="6" name="S14-card287"/>
+          <p:cNvPr id="6" name="S14-card265"/>
           <p:cNvSpPr/>
           <p:nvPr/>
         </p:nvSpPr>
@@ -8162,7 +8162,7 @@
       </p:sp>
       <p:sp>
         <p:nvSpPr>
-          <p:cNvPr id="7" name="S14-cardtext288"/>
+          <p:cNvPr id="7" name="S14-cardtext266"/>
           <p:cNvSpPr txBox="1"/>
           <p:nvPr/>
         </p:nvSpPr>
@@ -8224,7 +8224,7 @@
       </p:sp>
       <p:sp>
         <p:nvSpPr>
-          <p:cNvPr id="8" name="S14-chip289"/>
+          <p:cNvPr id="8" name="S14-chip267"/>
           <p:cNvSpPr txBox="1"/>
           <p:nvPr/>
         </p:nvSpPr>
@@ -8271,7 +8271,7 @@
       </p:sp>
       <p:sp>
         <p:nvSpPr>
-          <p:cNvPr id="9" name="S14-card290"/>
+          <p:cNvPr id="9" name="S14-card268"/>
           <p:cNvSpPr/>
           <p:nvPr/>
         </p:nvSpPr>
@@ -8298,7 +8298,7 @@
       </p:sp>
       <p:sp>
         <p:nvSpPr>
-          <p:cNvPr id="10" name="S14-cardtext291"/>
+          <p:cNvPr id="10" name="S14-cardtext269"/>
           <p:cNvSpPr txBox="1"/>
           <p:nvPr/>
         </p:nvSpPr>
@@ -8360,7 +8360,7 @@
       </p:sp>
       <p:sp>
         <p:nvSpPr>
-          <p:cNvPr id="11" name="S14-chip292"/>
+          <p:cNvPr id="11" name="S14-chip270"/>
           <p:cNvSpPr txBox="1"/>
           <p:nvPr/>
         </p:nvSpPr>
@@ -8407,7 +8407,7 @@
       </p:sp>
       <p:sp>
         <p:nvSpPr>
-          <p:cNvPr id="12" name="S14-card293"/>
+          <p:cNvPr id="12" name="S14-card271"/>
           <p:cNvSpPr/>
           <p:nvPr/>
         </p:nvSpPr>
@@ -8434,7 +8434,7 @@
       </p:sp>
       <p:sp>
         <p:nvSpPr>
-          <p:cNvPr id="13" name="S14-cardtext294"/>
+          <p:cNvPr id="13" name="S14-cardtext272"/>
           <p:cNvSpPr txBox="1"/>
           <p:nvPr/>
         </p:nvSpPr>
@@ -8496,7 +8496,7 @@
       </p:sp>
       <p:sp>
         <p:nvSpPr>
-          <p:cNvPr id="14" name="S14-chip295"/>
+          <p:cNvPr id="14" name="S14-chip273"/>
           <p:cNvSpPr txBox="1"/>
           <p:nvPr/>
         </p:nvSpPr>
@@ -8543,7 +8543,7 @@
       </p:sp>
       <p:sp>
         <p:nvSpPr>
-          <p:cNvPr id="15" name="S14-card296"/>
+          <p:cNvPr id="15" name="S14-card274"/>
           <p:cNvSpPr/>
           <p:nvPr/>
         </p:nvSpPr>
@@ -8570,7 +8570,7 @@
       </p:sp>
       <p:sp>
         <p:nvSpPr>
-          <p:cNvPr id="16" name="S14-cardtext297"/>
+          <p:cNvPr id="16" name="S14-cardtext275"/>
           <p:cNvSpPr txBox="1"/>
           <p:nvPr/>
         </p:nvSpPr>
@@ -8746,7 +8746,7 @@
       </p:sp>
       <p:sp>
         <p:nvSpPr>
-          <p:cNvPr id="3" name="S15-card298"/>
+          <p:cNvPr id="3" name="S15-card276"/>
           <p:cNvSpPr/>
           <p:nvPr/>
         </p:nvSpPr>
@@ -8773,7 +8773,7 @@
       </p:sp>
       <p:sp>
         <p:nvSpPr>
-          <p:cNvPr id="4" name="S15-cardtext299"/>
+          <p:cNvPr id="4" name="S15-cardtext277"/>
           <p:cNvSpPr txBox="1"/>
           <p:nvPr/>
         </p:nvSpPr>
@@ -8815,7 +8815,7 @@
       </p:sp>
       <p:sp>
         <p:nvSpPr>
-          <p:cNvPr id="5" name="S15-chip300"/>
+          <p:cNvPr id="5" name="S15-chip278"/>
           <p:cNvSpPr txBox="1"/>
           <p:nvPr/>
         </p:nvSpPr>
@@ -8862,7 +8862,7 @@
       </p:sp>
       <p:sp>
         <p:nvSpPr>
-          <p:cNvPr id="6" name="S15-chip301"/>
+          <p:cNvPr id="6" name="S15-chip279"/>
           <p:cNvSpPr txBox="1"/>
           <p:nvPr/>
         </p:nvSpPr>
@@ -8909,7 +8909,7 @@
       </p:sp>
       <p:sp>
         <p:nvSpPr>
-          <p:cNvPr id="7" name="S15-text302"/>
+          <p:cNvPr id="7" name="S15-text280"/>
           <p:cNvSpPr txBox="1"/>
           <p:nvPr/>
         </p:nvSpPr>
@@ -8948,7 +8948,7 @@
       </p:sp>
       <p:sp>
         <p:nvSpPr>
-          <p:cNvPr id="8" name="S15-text303"/>
+          <p:cNvPr id="8" name="S15-text281"/>
           <p:cNvSpPr txBox="1"/>
           <p:nvPr/>
         </p:nvSpPr>
@@ -9004,7 +9004,7 @@
       </p:sp>
       <p:sp>
         <p:nvSpPr>
-          <p:cNvPr id="9" name="S15-text304"/>
+          <p:cNvPr id="9" name="S15-text282"/>
           <p:cNvSpPr txBox="1"/>
           <p:nvPr/>
         </p:nvSpPr>
@@ -9060,7 +9060,7 @@
       </p:sp>
       <p:sp>
         <p:nvSpPr>
-          <p:cNvPr id="10" name="S15-text305"/>
+          <p:cNvPr id="10" name="S15-text283"/>
           <p:cNvSpPr txBox="1"/>
           <p:nvPr/>
         </p:nvSpPr>
@@ -9116,7 +9116,7 @@
       </p:sp>
       <p:sp>
         <p:nvSpPr>
-          <p:cNvPr id="11" name="S15-text306"/>
+          <p:cNvPr id="11" name="S15-text284"/>
           <p:cNvSpPr txBox="1"/>
           <p:nvPr/>
         </p:nvSpPr>
@@ -9269,7 +9269,7 @@
       </p:sp>
       <p:sp>
         <p:nvSpPr>
-          <p:cNvPr id="3" name="S16-figure307" descr="직육면체의 겨냥도: 보이는 모서리 9개는 실선, 보이지 않는 모서리 3개는 점선"/>
+          <p:cNvPr id="3" name="S16-figure285" descr="직육면체의 겨냥도: 보이는 모서리 9개는 실선, 보이지 않는 모서리 3개는 점선"/>
           <p:cNvSpPr/>
           <p:nvPr/>
         </p:nvSpPr>
@@ -9292,7 +9292,7 @@
       </p:sp>
       <p:sp>
         <p:nvSpPr>
-          <p:cNvPr id="4" name="S16-mark308"/>
+          <p:cNvPr id="4" name="S16-mark286"/>
           <p:cNvSpPr/>
           <p:nvPr/>
         </p:nvSpPr>
@@ -9315,7 +9315,7 @@
       </p:sp>
       <p:sp>
         <p:nvSpPr>
-          <p:cNvPr id="5" name="S16-mark309"/>
+          <p:cNvPr id="5" name="S16-mark287"/>
           <p:cNvSpPr/>
           <p:nvPr/>
         </p:nvSpPr>
@@ -9338,7 +9338,7 @@
       </p:sp>
       <p:sp>
         <p:nvSpPr>
-          <p:cNvPr id="6" name="S16-mark310"/>
+          <p:cNvPr id="6" name="S16-mark288"/>
           <p:cNvSpPr/>
           <p:nvPr/>
         </p:nvSpPr>
@@ -9361,7 +9361,7 @@
       </p:sp>
       <p:sp>
         <p:nvSpPr>
-          <p:cNvPr id="7" name="S16-mark311"/>
+          <p:cNvPr id="7" name="S16-mark289"/>
           <p:cNvSpPr/>
           <p:nvPr/>
         </p:nvSpPr>
@@ -9384,7 +9384,7 @@
       </p:sp>
       <p:sp>
         <p:nvSpPr>
-          <p:cNvPr id="8" name="S16-mark312"/>
+          <p:cNvPr id="8" name="S16-mark290"/>
           <p:cNvSpPr/>
           <p:nvPr/>
         </p:nvSpPr>
@@ -9407,7 +9407,7 @@
       </p:sp>
       <p:sp>
         <p:nvSpPr>
-          <p:cNvPr id="9" name="S16-mark313"/>
+          <p:cNvPr id="9" name="S16-mark291"/>
           <p:cNvSpPr/>
           <p:nvPr/>
         </p:nvSpPr>
@@ -9430,7 +9430,7 @@
       </p:sp>
       <p:sp>
         <p:nvSpPr>
-          <p:cNvPr id="10" name="S16-mark314"/>
+          <p:cNvPr id="10" name="S16-mark292"/>
           <p:cNvSpPr/>
           <p:nvPr/>
         </p:nvSpPr>
@@ -9453,7 +9453,7 @@
       </p:sp>
       <p:sp>
         <p:nvSpPr>
-          <p:cNvPr id="11" name="S16-mark315"/>
+          <p:cNvPr id="11" name="S16-mark293"/>
           <p:cNvSpPr/>
           <p:nvPr/>
         </p:nvSpPr>
@@ -9476,7 +9476,7 @@
       </p:sp>
       <p:sp>
         <p:nvSpPr>
-          <p:cNvPr id="12" name="S16-mark316"/>
+          <p:cNvPr id="12" name="S16-mark294"/>
           <p:cNvSpPr/>
           <p:nvPr/>
         </p:nvSpPr>
@@ -9499,7 +9499,7 @@
       </p:sp>
       <p:sp>
         <p:nvSpPr>
-          <p:cNvPr id="13" name="S16-mark317"/>
+          <p:cNvPr id="13" name="S16-mark295"/>
           <p:cNvSpPr/>
           <p:nvPr/>
         </p:nvSpPr>
@@ -9522,7 +9522,7 @@
       </p:sp>
       <p:sp>
         <p:nvSpPr>
-          <p:cNvPr id="14" name="S16-mark318"/>
+          <p:cNvPr id="14" name="S16-mark296"/>
           <p:cNvSpPr/>
           <p:nvPr/>
         </p:nvSpPr>
@@ -9545,7 +9545,7 @@
       </p:sp>
       <p:sp>
         <p:nvSpPr>
-          <p:cNvPr id="15" name="S16-card319"/>
+          <p:cNvPr id="15" name="S16-card297"/>
           <p:cNvSpPr/>
           <p:nvPr/>
         </p:nvSpPr>
@@ -9572,7 +9572,7 @@
       </p:sp>
       <p:sp>
         <p:nvSpPr>
-          <p:cNvPr id="16" name="S16-cardtext320"/>
+          <p:cNvPr id="16" name="S16-cardtext298"/>
           <p:cNvSpPr txBox="1"/>
           <p:nvPr/>
         </p:nvSpPr>
@@ -9634,7 +9634,7 @@
       </p:sp>
       <p:sp>
         <p:nvSpPr>
-          <p:cNvPr id="17" name="S16-card321"/>
+          <p:cNvPr id="17" name="S16-card299"/>
           <p:cNvSpPr/>
           <p:nvPr/>
         </p:nvSpPr>
@@ -9661,7 +9661,7 @@
       </p:sp>
       <p:sp>
         <p:nvSpPr>
-          <p:cNvPr id="18" name="S16-cardtext322"/>
+          <p:cNvPr id="18" name="S16-cardtext300"/>
           <p:cNvSpPr txBox="1"/>
           <p:nvPr/>
         </p:nvSpPr>
@@ -10694,232 +10694,14 @@
       </p:sp>
       <p:sp>
         <p:nvSpPr>
-          <p:cNvPr id="5" name="S03-card37"/>
-          <p:cNvSpPr/>
-          <p:nvPr/>
-        </p:nvSpPr>
-        <p:spPr>
-          <a:xfrm>
-            <a:off x="548640" y="3599688"/>
-            <a:ext cx="5431536" cy="1520952"/>
-          </a:xfrm>
-          <a:prstGeom prst="roundRect">
-            <a:avLst>
-              <a:gd name="adj" fmla="val 7214"/>
-            </a:avLst>
-          </a:prstGeom>
-          <a:solidFill>
-            <a:srgbClr val="EAF3F1"/>
-          </a:solidFill>
-          <a:ln w="12700">
-            <a:solidFill>
-              <a:srgbClr val="EAF3F1"/>
-            </a:solidFill>
-            <a:prstDash val="solid"/>
-          </a:ln>
-        </p:spPr>
-      </p:sp>
-      <p:sp>
-        <p:nvSpPr>
-          <p:cNvPr id="6" name="S03-cardtext38"/>
-          <p:cNvSpPr txBox="1"/>
-          <p:nvPr/>
-        </p:nvSpPr>
-        <p:spPr>
-          <a:xfrm>
-            <a:off x="822960" y="3736848"/>
-            <a:ext cx="4882896" cy="1246632"/>
-          </a:xfrm>
-          <a:prstGeom prst="rect">
-            <a:avLst/>
-          </a:prstGeom>
-          <a:noFill/>
-          <a:ln/>
-        </p:spPr>
-        <p:txBody>
-          <a:bodyPr wrap="square" lIns="0" tIns="0" rIns="0" bIns="0" rtlCol="0" anchor="ctr"/>
-          <a:lstStyle/>
-          <a:p>
-            <a:pPr eaLnBrk="0" indent="0" marL="0">
-              <a:spcAft>
-                <a:spcPts val="600"/>
-              </a:spcAft>
-              <a:buNone/>
-            </a:pPr>
-            <a:r>
-              <a:rPr lang="ko-KR" altLang="en-US" sz="2800" b="1" dirty="0">
-                <a:solidFill>
-                  <a:srgbClr val="1F2937"/>
-                </a:solidFill>
-                <a:latin typeface="맑은 고딕" pitchFamily="34" charset="0"/>
-                <a:ea typeface="맑은 고딕" pitchFamily="34" charset="-122"/>
-                <a:cs typeface="맑은 고딕" pitchFamily="34" charset="-120"/>
-              </a:rPr>
-              <a:t>밑면</a:t>
-            </a:r>
-            <a:endParaRPr lang="ko-KR" sz="2800" dirty="0"/>
-          </a:p>
-          <a:p>
-            <a:pPr eaLnBrk="0" indent="0" marL="0">
-              <a:spcAft>
-                <a:spcPts val="600"/>
-              </a:spcAft>
-              <a:buNone/>
-            </a:pPr>
-            <a:r>
-              <a:rPr lang="ko-KR" altLang="en-US" sz="2200" dirty="0">
-                <a:solidFill>
-                  <a:srgbClr val="1F2937"/>
-                </a:solidFill>
-                <a:latin typeface="맑은 고딕" pitchFamily="34" charset="0"/>
-                <a:ea typeface="맑은 고딕" pitchFamily="34" charset="-122"/>
-                <a:cs typeface="맑은 고딕" pitchFamily="34" charset="-120"/>
-              </a:rPr>
-              <a:t>서로 평행하고</a:t>
-            </a:r>
-            <a:endParaRPr lang="ko-KR" sz="2800" dirty="0"/>
-          </a:p>
-          <a:p>
-            <a:pPr eaLnBrk="0" indent="0" marL="0">
-              <a:spcAft>
-                <a:spcPts val="600"/>
-              </a:spcAft>
-              <a:buNone/>
-            </a:pPr>
-            <a:r>
-              <a:rPr lang="ko-KR" altLang="en-US" sz="2200" dirty="0">
-                <a:solidFill>
-                  <a:srgbClr val="1F2937"/>
-                </a:solidFill>
-                <a:latin typeface="맑은 고딕" pitchFamily="34" charset="0"/>
-                <a:ea typeface="맑은 고딕" pitchFamily="34" charset="-122"/>
-                <a:cs typeface="맑은 고딕" pitchFamily="34" charset="-120"/>
-              </a:rPr>
-              <a:t>합동인 두 면</a:t>
-            </a:r>
-            <a:endParaRPr lang="ko-KR" sz="2800" dirty="0"/>
-          </a:p>
-        </p:txBody>
-      </p:sp>
-      <p:sp>
-        <p:nvSpPr>
-          <p:cNvPr id="7" name="S03-card39"/>
-          <p:cNvSpPr/>
-          <p:nvPr/>
-        </p:nvSpPr>
-        <p:spPr>
-          <a:xfrm>
-            <a:off x="6208776" y="3599688"/>
-            <a:ext cx="5431536" cy="1520952"/>
-          </a:xfrm>
-          <a:prstGeom prst="roundRect">
-            <a:avLst>
-              <a:gd name="adj" fmla="val 7214"/>
-            </a:avLst>
-          </a:prstGeom>
-          <a:solidFill>
-            <a:srgbClr val="EAF3F1"/>
-          </a:solidFill>
-          <a:ln w="12700">
-            <a:solidFill>
-              <a:srgbClr val="EAF3F1"/>
-            </a:solidFill>
-            <a:prstDash val="solid"/>
-          </a:ln>
-        </p:spPr>
-      </p:sp>
-      <p:sp>
-        <p:nvSpPr>
-          <p:cNvPr id="8" name="S03-cardtext40"/>
-          <p:cNvSpPr txBox="1"/>
-          <p:nvPr/>
-        </p:nvSpPr>
-        <p:spPr>
-          <a:xfrm>
-            <a:off x="6483096" y="3736848"/>
-            <a:ext cx="4882896" cy="1246632"/>
-          </a:xfrm>
-          <a:prstGeom prst="rect">
-            <a:avLst/>
-          </a:prstGeom>
-          <a:noFill/>
-          <a:ln/>
-        </p:spPr>
-        <p:txBody>
-          <a:bodyPr wrap="square" lIns="0" tIns="0" rIns="0" bIns="0" rtlCol="0" anchor="ctr"/>
-          <a:lstStyle/>
-          <a:p>
-            <a:pPr eaLnBrk="0" indent="0" marL="0">
-              <a:spcAft>
-                <a:spcPts val="600"/>
-              </a:spcAft>
-              <a:buNone/>
-            </a:pPr>
-            <a:r>
-              <a:rPr lang="ko-KR" altLang="en-US" sz="2800" b="1" dirty="0">
-                <a:solidFill>
-                  <a:srgbClr val="1F2937"/>
-                </a:solidFill>
-                <a:latin typeface="맑은 고딕" pitchFamily="34" charset="0"/>
-                <a:ea typeface="맑은 고딕" pitchFamily="34" charset="-122"/>
-                <a:cs typeface="맑은 고딕" pitchFamily="34" charset="-120"/>
-              </a:rPr>
-              <a:t>옆면</a:t>
-            </a:r>
-            <a:endParaRPr lang="ko-KR" sz="2800" dirty="0"/>
-          </a:p>
-          <a:p>
-            <a:pPr eaLnBrk="0" indent="0" marL="0">
-              <a:spcAft>
-                <a:spcPts val="600"/>
-              </a:spcAft>
-              <a:buNone/>
-            </a:pPr>
-            <a:r>
-              <a:rPr lang="ko-KR" altLang="en-US" sz="2200" dirty="0">
-                <a:solidFill>
-                  <a:srgbClr val="1F2937"/>
-                </a:solidFill>
-                <a:latin typeface="맑은 고딕" pitchFamily="34" charset="0"/>
-                <a:ea typeface="맑은 고딕" pitchFamily="34" charset="-122"/>
-                <a:cs typeface="맑은 고딕" pitchFamily="34" charset="-120"/>
-              </a:rPr>
-              <a:t>두 밑면과 만나는 면</a:t>
-            </a:r>
-            <a:endParaRPr lang="ko-KR" sz="2800" dirty="0"/>
-          </a:p>
-          <a:p>
-            <a:pPr eaLnBrk="0" indent="0" marL="0">
-              <a:spcAft>
-                <a:spcPts val="600"/>
-              </a:spcAft>
-              <a:buNone/>
-            </a:pPr>
-            <a:r>
-              <a:rPr lang="ko-KR" altLang="en-US" sz="2200" dirty="0">
-                <a:solidFill>
-                  <a:srgbClr val="1F2937"/>
-                </a:solidFill>
-                <a:latin typeface="맑은 고딕" pitchFamily="34" charset="0"/>
-                <a:ea typeface="맑은 고딕" pitchFamily="34" charset="-122"/>
-                <a:cs typeface="맑은 고딕" pitchFamily="34" charset="-120"/>
-              </a:rPr>
-              <a:t>모두 직사각형</a:t>
-            </a:r>
-            <a:endParaRPr lang="ko-KR" sz="2800" dirty="0"/>
-          </a:p>
-        </p:txBody>
-      </p:sp>
-      <p:sp>
-        <p:nvSpPr>
-          <p:cNvPr id="9" name="S03-figure41" descr="삼각기둥의 겨냥도: 위아래 밑면(삼각형)을 색칠, 보이지 않는 모서리 3개는 점선"/>
-          <p:cNvSpPr/>
-          <p:nvPr/>
-        </p:nvSpPr>
-        <p:spPr>
-          <a:xfrm>
-            <a:off x="2480608" y="2523270"/>
-            <a:ext cx="1187808" cy="276537"/>
+          <p:cNvPr id="5" name="S03-figure37" descr="삼각기둥의 겨냥도: 위아래 밑면(삼각형)을 색칠, 보이지 않는 모서리 3개는 점선"/>
+          <p:cNvSpPr/>
+          <p:nvPr/>
+        </p:nvSpPr>
+        <p:spPr>
+          <a:xfrm>
+            <a:off x="1087450" y="4208526"/>
+            <a:ext cx="2926080" cy="681228"/>
           </a:xfrm>
           <a:custGeom>
             <a:avLst/>
@@ -10928,15 +10710,15 @@
             <a:cxnLst/>
             <a:rect l="l" t="t" r="r" b="b"/>
             <a:pathLst>
-              <a:path w="1187808" h="276537">
+              <a:path w="2926080" h="681228">
                 <a:moveTo>
-                  <a:pt x="0" y="276537"/>
+                  <a:pt x="0" y="681228"/>
                 </a:moveTo>
                 <a:lnTo>
-                  <a:pt x="1187808" y="276537"/>
+                  <a:pt x="2926080" y="681228"/>
                 </a:lnTo>
                 <a:lnTo>
-                  <a:pt x="799172" y="0"/>
+                  <a:pt x="1968703" y="0"/>
                 </a:lnTo>
                 <a:close/>
               </a:path>
@@ -10955,14 +10737,14 @@
       </p:sp>
       <p:sp>
         <p:nvSpPr>
-          <p:cNvPr id="10" name="S03-mark42"/>
-          <p:cNvSpPr/>
-          <p:nvPr/>
-        </p:nvSpPr>
-        <p:spPr>
-          <a:xfrm>
-            <a:off x="2480608" y="1409700"/>
-            <a:ext cx="1187808" cy="276537"/>
+          <p:cNvPr id="6" name="S03-mark38"/>
+          <p:cNvSpPr/>
+          <p:nvPr/>
+        </p:nvSpPr>
+        <p:spPr>
+          <a:xfrm>
+            <a:off x="1087450" y="1465326"/>
+            <a:ext cx="2926080" cy="681228"/>
           </a:xfrm>
           <a:custGeom>
             <a:avLst/>
@@ -10971,15 +10753,15 @@
             <a:cxnLst/>
             <a:rect l="l" t="t" r="r" b="b"/>
             <a:pathLst>
-              <a:path w="1187808" h="276537">
+              <a:path w="2926080" h="681228">
                 <a:moveTo>
-                  <a:pt x="0" y="276537"/>
+                  <a:pt x="0" y="681228"/>
                 </a:moveTo>
                 <a:lnTo>
-                  <a:pt x="1187808" y="276537"/>
+                  <a:pt x="2926080" y="681228"/>
                 </a:lnTo>
                 <a:lnTo>
-                  <a:pt x="799172" y="0"/>
+                  <a:pt x="1968703" y="0"/>
                 </a:lnTo>
                 <a:close/>
               </a:path>
@@ -10998,83 +10780,198 @@
       </p:sp>
       <p:sp>
         <p:nvSpPr>
+          <p:cNvPr id="7" name="S03-mark39"/>
+          <p:cNvSpPr/>
+          <p:nvPr/>
+        </p:nvSpPr>
+        <p:spPr>
+          <a:xfrm flipH="1" flipV="1">
+            <a:off x="3056153" y="4208526"/>
+            <a:ext cx="957377" cy="681228"/>
+          </a:xfrm>
+          <a:prstGeom prst="line">
+            <a:avLst/>
+          </a:prstGeom>
+          <a:noFill/>
+          <a:ln w="22225">
+            <a:solidFill>
+              <a:srgbClr val="1F2937"/>
+            </a:solidFill>
+            <a:prstDash val="dash"/>
+          </a:ln>
+        </p:spPr>
+      </p:sp>
+      <p:sp>
+        <p:nvSpPr>
+          <p:cNvPr id="8" name="S03-mark40"/>
+          <p:cNvSpPr/>
+          <p:nvPr/>
+        </p:nvSpPr>
+        <p:spPr>
+          <a:xfrm flipV="1">
+            <a:off x="1087450" y="4208526"/>
+            <a:ext cx="1968703" cy="681228"/>
+          </a:xfrm>
+          <a:prstGeom prst="line">
+            <a:avLst/>
+          </a:prstGeom>
+          <a:noFill/>
+          <a:ln w="22225">
+            <a:solidFill>
+              <a:srgbClr val="1F2937"/>
+            </a:solidFill>
+            <a:prstDash val="dash"/>
+          </a:ln>
+        </p:spPr>
+      </p:sp>
+      <p:sp>
+        <p:nvSpPr>
+          <p:cNvPr id="9" name="S03-mark41"/>
+          <p:cNvSpPr/>
+          <p:nvPr/>
+        </p:nvSpPr>
+        <p:spPr>
+          <a:xfrm flipV="1">
+            <a:off x="3056153" y="1465326"/>
+            <a:ext cx="0" cy="2743200"/>
+          </a:xfrm>
+          <a:prstGeom prst="line">
+            <a:avLst/>
+          </a:prstGeom>
+          <a:noFill/>
+          <a:ln w="22225">
+            <a:solidFill>
+              <a:srgbClr val="1F2937"/>
+            </a:solidFill>
+            <a:prstDash val="dash"/>
+          </a:ln>
+        </p:spPr>
+      </p:sp>
+      <p:sp>
+        <p:nvSpPr>
+          <p:cNvPr id="10" name="S03-mark42"/>
+          <p:cNvSpPr/>
+          <p:nvPr/>
+        </p:nvSpPr>
+        <p:spPr>
+          <a:xfrm>
+            <a:off x="1087450" y="4889754"/>
+            <a:ext cx="2926080" cy="0"/>
+          </a:xfrm>
+          <a:prstGeom prst="line">
+            <a:avLst/>
+          </a:prstGeom>
+          <a:noFill/>
+          <a:ln w="28575">
+            <a:solidFill>
+              <a:srgbClr val="1F2937"/>
+            </a:solidFill>
+            <a:prstDash val="solid"/>
+          </a:ln>
+        </p:spPr>
+      </p:sp>
+      <p:sp>
+        <p:nvSpPr>
           <p:cNvPr id="11" name="S03-mark43"/>
           <p:cNvSpPr/>
           <p:nvPr/>
         </p:nvSpPr>
         <p:spPr>
+          <a:xfrm>
+            <a:off x="1087450" y="2146554"/>
+            <a:ext cx="2926080" cy="0"/>
+          </a:xfrm>
+          <a:prstGeom prst="line">
+            <a:avLst/>
+          </a:prstGeom>
+          <a:noFill/>
+          <a:ln w="28575">
+            <a:solidFill>
+              <a:srgbClr val="1F2937"/>
+            </a:solidFill>
+            <a:prstDash val="solid"/>
+          </a:ln>
+        </p:spPr>
+      </p:sp>
+      <p:sp>
+        <p:nvSpPr>
+          <p:cNvPr id="12" name="S03-mark44"/>
+          <p:cNvSpPr/>
+          <p:nvPr/>
+        </p:nvSpPr>
+        <p:spPr>
           <a:xfrm flipH="1" flipV="1">
-            <a:off x="3279781" y="2523270"/>
-            <a:ext cx="388636" cy="276537"/>
+            <a:off x="3056153" y="1465326"/>
+            <a:ext cx="957377" cy="681228"/>
           </a:xfrm>
           <a:prstGeom prst="line">
             <a:avLst/>
           </a:prstGeom>
           <a:noFill/>
-          <a:ln w="22225">
+          <a:ln w="28575">
             <a:solidFill>
               <a:srgbClr val="1F2937"/>
             </a:solidFill>
-            <a:prstDash val="dash"/>
-          </a:ln>
-        </p:spPr>
-      </p:sp>
-      <p:sp>
-        <p:nvSpPr>
-          <p:cNvPr id="12" name="S03-mark44"/>
+            <a:prstDash val="solid"/>
+          </a:ln>
+        </p:spPr>
+      </p:sp>
+      <p:sp>
+        <p:nvSpPr>
+          <p:cNvPr id="13" name="S03-mark45"/>
           <p:cNvSpPr/>
           <p:nvPr/>
         </p:nvSpPr>
         <p:spPr>
           <a:xfrm flipV="1">
-            <a:off x="2480608" y="2523270"/>
-            <a:ext cx="799172" cy="276537"/>
+            <a:off x="1087450" y="1465326"/>
+            <a:ext cx="1968703" cy="681228"/>
           </a:xfrm>
           <a:prstGeom prst="line">
             <a:avLst/>
           </a:prstGeom>
           <a:noFill/>
-          <a:ln w="22225">
+          <a:ln w="28575">
             <a:solidFill>
               <a:srgbClr val="1F2937"/>
             </a:solidFill>
-            <a:prstDash val="dash"/>
-          </a:ln>
-        </p:spPr>
-      </p:sp>
-      <p:sp>
-        <p:nvSpPr>
-          <p:cNvPr id="13" name="S03-mark45"/>
+            <a:prstDash val="solid"/>
+          </a:ln>
+        </p:spPr>
+      </p:sp>
+      <p:sp>
+        <p:nvSpPr>
+          <p:cNvPr id="14" name="S03-mark46"/>
           <p:cNvSpPr/>
           <p:nvPr/>
         </p:nvSpPr>
         <p:spPr>
           <a:xfrm flipV="1">
-            <a:off x="3279781" y="1409700"/>
-            <a:ext cx="0" cy="1113570"/>
+            <a:off x="4013530" y="2146554"/>
+            <a:ext cx="0" cy="2743200"/>
           </a:xfrm>
           <a:prstGeom prst="line">
             <a:avLst/>
           </a:prstGeom>
           <a:noFill/>
-          <a:ln w="22225">
+          <a:ln w="28575">
             <a:solidFill>
               <a:srgbClr val="1F2937"/>
             </a:solidFill>
-            <a:prstDash val="dash"/>
-          </a:ln>
-        </p:spPr>
-      </p:sp>
-      <p:sp>
-        <p:nvSpPr>
-          <p:cNvPr id="14" name="S03-mark46"/>
-          <p:cNvSpPr/>
-          <p:nvPr/>
-        </p:nvSpPr>
-        <p:spPr>
-          <a:xfrm>
-            <a:off x="2480608" y="2799807"/>
-            <a:ext cx="1187808" cy="0"/>
+            <a:prstDash val="solid"/>
+          </a:ln>
+        </p:spPr>
+      </p:sp>
+      <p:sp>
+        <p:nvSpPr>
+          <p:cNvPr id="15" name="S03-mark47"/>
+          <p:cNvSpPr/>
+          <p:nvPr/>
+        </p:nvSpPr>
+        <p:spPr>
+          <a:xfrm flipV="1">
+            <a:off x="1087450" y="2146554"/>
+            <a:ext cx="0" cy="2743200"/>
           </a:xfrm>
           <a:prstGeom prst="line">
             <a:avLst/>
@@ -11090,128 +10987,13 @@
       </p:sp>
       <p:sp>
         <p:nvSpPr>
-          <p:cNvPr id="15" name="S03-mark47"/>
-          <p:cNvSpPr/>
-          <p:nvPr/>
-        </p:nvSpPr>
-        <p:spPr>
-          <a:xfrm>
-            <a:off x="2480608" y="1686237"/>
-            <a:ext cx="1187808" cy="0"/>
-          </a:xfrm>
-          <a:prstGeom prst="line">
-            <a:avLst/>
-          </a:prstGeom>
-          <a:noFill/>
-          <a:ln w="28575">
-            <a:solidFill>
-              <a:srgbClr val="1F2937"/>
-            </a:solidFill>
-            <a:prstDash val="solid"/>
-          </a:ln>
-        </p:spPr>
-      </p:sp>
-      <p:sp>
-        <p:nvSpPr>
-          <p:cNvPr id="16" name="S03-mark48"/>
-          <p:cNvSpPr/>
-          <p:nvPr/>
-        </p:nvSpPr>
-        <p:spPr>
-          <a:xfrm flipH="1" flipV="1">
-            <a:off x="3279781" y="1409700"/>
-            <a:ext cx="388636" cy="276537"/>
-          </a:xfrm>
-          <a:prstGeom prst="line">
-            <a:avLst/>
-          </a:prstGeom>
-          <a:noFill/>
-          <a:ln w="28575">
-            <a:solidFill>
-              <a:srgbClr val="1F2937"/>
-            </a:solidFill>
-            <a:prstDash val="solid"/>
-          </a:ln>
-        </p:spPr>
-      </p:sp>
-      <p:sp>
-        <p:nvSpPr>
-          <p:cNvPr id="17" name="S03-mark49"/>
-          <p:cNvSpPr/>
-          <p:nvPr/>
-        </p:nvSpPr>
-        <p:spPr>
-          <a:xfrm flipV="1">
-            <a:off x="2480608" y="1409700"/>
-            <a:ext cx="799172" cy="276537"/>
-          </a:xfrm>
-          <a:prstGeom prst="line">
-            <a:avLst/>
-          </a:prstGeom>
-          <a:noFill/>
-          <a:ln w="28575">
-            <a:solidFill>
-              <a:srgbClr val="1F2937"/>
-            </a:solidFill>
-            <a:prstDash val="solid"/>
-          </a:ln>
-        </p:spPr>
-      </p:sp>
-      <p:sp>
-        <p:nvSpPr>
-          <p:cNvPr id="18" name="S03-mark50"/>
-          <p:cNvSpPr/>
-          <p:nvPr/>
-        </p:nvSpPr>
-        <p:spPr>
-          <a:xfrm flipV="1">
-            <a:off x="3668417" y="1686237"/>
-            <a:ext cx="0" cy="1113570"/>
-          </a:xfrm>
-          <a:prstGeom prst="line">
-            <a:avLst/>
-          </a:prstGeom>
-          <a:noFill/>
-          <a:ln w="28575">
-            <a:solidFill>
-              <a:srgbClr val="1F2937"/>
-            </a:solidFill>
-            <a:prstDash val="solid"/>
-          </a:ln>
-        </p:spPr>
-      </p:sp>
-      <p:sp>
-        <p:nvSpPr>
-          <p:cNvPr id="19" name="S03-mark51"/>
-          <p:cNvSpPr/>
-          <p:nvPr/>
-        </p:nvSpPr>
-        <p:spPr>
-          <a:xfrm flipV="1">
-            <a:off x="2480608" y="1686237"/>
-            <a:ext cx="0" cy="1113570"/>
-          </a:xfrm>
-          <a:prstGeom prst="line">
-            <a:avLst/>
-          </a:prstGeom>
-          <a:noFill/>
-          <a:ln w="28575">
-            <a:solidFill>
-              <a:srgbClr val="1F2937"/>
-            </a:solidFill>
-            <a:prstDash val="solid"/>
-          </a:ln>
-        </p:spPr>
-      </p:sp>
-      <p:sp>
-        <p:nvSpPr>
-          <p:cNvPr id="20" name="S03-label53"/>
+          <p:cNvPr id="16" name="S03-label49"/>
           <p:cNvSpPr txBox="1"/>
           <p:nvPr/>
         </p:nvSpPr>
         <p:spPr>
           <a:xfrm>
-            <a:off x="3673812" y="1381695"/>
+            <a:off x="4507814" y="1651889"/>
             <a:ext cx="657352" cy="349250"/>
           </a:xfrm>
           <a:prstGeom prst="rect">
@@ -11244,13 +11026,13 @@
       </p:sp>
       <p:sp>
         <p:nvSpPr>
-          <p:cNvPr id="21" name="S03-label55"/>
+          <p:cNvPr id="17" name="S03-label51"/>
           <p:cNvSpPr txBox="1"/>
           <p:nvPr/>
         </p:nvSpPr>
         <p:spPr>
           <a:xfrm>
-            <a:off x="3673812" y="2662301"/>
+            <a:off x="4507814" y="4806569"/>
             <a:ext cx="657352" cy="349250"/>
           </a:xfrm>
           <a:prstGeom prst="rect">
@@ -11283,13 +11065,13 @@
       </p:sp>
       <p:sp>
         <p:nvSpPr>
-          <p:cNvPr id="22" name="S03-label57"/>
+          <p:cNvPr id="18" name="S03-label53"/>
           <p:cNvSpPr txBox="1"/>
           <p:nvPr/>
         </p:nvSpPr>
         <p:spPr>
           <a:xfrm>
-            <a:off x="2727277" y="2068397"/>
+            <a:off x="2176094" y="3343529"/>
             <a:ext cx="657352" cy="349250"/>
           </a:xfrm>
           <a:prstGeom prst="rect">
@@ -11322,14 +11104,41 @@
       </p:sp>
       <p:sp>
         <p:nvSpPr>
-          <p:cNvPr id="23" name="S03-label58"/>
+          <p:cNvPr id="19" name="S03-card54"/>
+          <p:cNvSpPr/>
+          <p:nvPr/>
+        </p:nvSpPr>
+        <p:spPr>
+          <a:xfrm>
+            <a:off x="5741060" y="1588008"/>
+            <a:ext cx="5899252" cy="1520952"/>
+          </a:xfrm>
+          <a:prstGeom prst="roundRect">
+            <a:avLst>
+              <a:gd name="adj" fmla="val 7214"/>
+            </a:avLst>
+          </a:prstGeom>
+          <a:solidFill>
+            <a:srgbClr val="EAF3F1"/>
+          </a:solidFill>
+          <a:ln w="12700">
+            <a:solidFill>
+              <a:srgbClr val="EAF3F1"/>
+            </a:solidFill>
+            <a:prstDash val="solid"/>
+          </a:ln>
+        </p:spPr>
+      </p:sp>
+      <p:sp>
+        <p:nvSpPr>
+          <p:cNvPr id="20" name="S03-cardtext55"/>
           <p:cNvSpPr txBox="1"/>
           <p:nvPr/>
         </p:nvSpPr>
         <p:spPr>
           <a:xfrm>
-            <a:off x="548640" y="2993898"/>
-            <a:ext cx="5385816" cy="377190"/>
+            <a:off x="6015380" y="1725168"/>
+            <a:ext cx="5350612" cy="1246632"/>
           </a:xfrm>
           <a:prstGeom prst="rect">
             <a:avLst/>
@@ -11341,11 +11150,14 @@
           <a:bodyPr wrap="square" lIns="0" tIns="0" rIns="0" bIns="0" rtlCol="0" anchor="ctr"/>
           <a:lstStyle/>
           <a:p>
-            <a:pPr eaLnBrk="0" algn="ctr" indent="0" marL="0">
+            <a:pPr eaLnBrk="0" indent="0" marL="0">
+              <a:spcAft>
+                <a:spcPts val="600"/>
+              </a:spcAft>
               <a:buNone/>
             </a:pPr>
             <a:r>
-              <a:rPr lang="ko-KR" altLang="en-US" sz="2200" b="1" dirty="0">
+              <a:rPr lang="ko-KR" altLang="en-US" sz="2800" b="1" dirty="0">
                 <a:solidFill>
                   <a:srgbClr val="1F2937"/>
                 </a:solidFill>
@@ -11353,481 +11165,19 @@
                 <a:ea typeface="맑은 고딕" pitchFamily="34" charset="-122"/>
                 <a:cs typeface="맑은 고딕" pitchFamily="34" charset="-120"/>
               </a:rPr>
-              <a:t>삼각기둥</a:t>
-            </a:r>
-            <a:endParaRPr lang="ko-KR" sz="2200" dirty="0"/>
-          </a:p>
-        </p:txBody>
-      </p:sp>
-      <p:sp>
-        <p:nvSpPr>
-          <p:cNvPr id="24" name="S03-figure59" descr="오각기둥의 겨냥도: 위아래 밑면(오각형)을 색칠, 보이지 않는 모서리 5개는 점선"/>
-          <p:cNvSpPr/>
-          <p:nvPr/>
-        </p:nvSpPr>
-        <p:spPr>
-          <a:xfrm>
-            <a:off x="8366831" y="2485498"/>
-            <a:ext cx="1161145" cy="351428"/>
-          </a:xfrm>
-          <a:custGeom>
-            <a:avLst/>
-            <a:gdLst/>
-            <a:ahLst/>
-            <a:cxnLst/>
-            <a:rect l="l" t="t" r="r" b="b"/>
-            <a:pathLst>
-              <a:path w="1161145" h="351428">
-                <a:moveTo>
-                  <a:pt x="787126" y="0"/>
-                </a:moveTo>
-                <a:lnTo>
-                  <a:pt x="69927" y="134475"/>
-                </a:lnTo>
-                <a:lnTo>
-                  <a:pt x="0" y="351428"/>
-                </a:lnTo>
-                <a:lnTo>
-                  <a:pt x="674526" y="351428"/>
-                </a:lnTo>
-                <a:lnTo>
-                  <a:pt x="1161145" y="134475"/>
-                </a:lnTo>
-                <a:close/>
-              </a:path>
-            </a:pathLst>
-          </a:custGeom>
-          <a:solidFill>
-            <a:srgbClr val="F2C14E"/>
-          </a:solidFill>
-          <a:ln w="28575">
-            <a:solidFill>
-              <a:srgbClr val="1F2937"/>
-            </a:solidFill>
-            <a:prstDash val="dash"/>
-          </a:ln>
-        </p:spPr>
-      </p:sp>
-      <p:sp>
-        <p:nvSpPr>
-          <p:cNvPr id="25" name="S03-mark60"/>
-          <p:cNvSpPr/>
-          <p:nvPr/>
-        </p:nvSpPr>
-        <p:spPr>
-          <a:xfrm>
-            <a:off x="8366831" y="1409700"/>
-            <a:ext cx="1161145" cy="351428"/>
-          </a:xfrm>
-          <a:custGeom>
-            <a:avLst/>
-            <a:gdLst/>
-            <a:ahLst/>
-            <a:cxnLst/>
-            <a:rect l="l" t="t" r="r" b="b"/>
-            <a:pathLst>
-              <a:path w="1161145" h="351428">
-                <a:moveTo>
-                  <a:pt x="787126" y="0"/>
-                </a:moveTo>
-                <a:lnTo>
-                  <a:pt x="69927" y="134475"/>
-                </a:lnTo>
-                <a:lnTo>
-                  <a:pt x="0" y="351428"/>
-                </a:lnTo>
-                <a:lnTo>
-                  <a:pt x="674526" y="351428"/>
-                </a:lnTo>
-                <a:lnTo>
-                  <a:pt x="1161145" y="134475"/>
-                </a:lnTo>
-                <a:close/>
-              </a:path>
-            </a:pathLst>
-          </a:custGeom>
-          <a:solidFill>
-            <a:srgbClr val="F2C14E"/>
-          </a:solidFill>
-          <a:ln w="28575">
-            <a:solidFill>
-              <a:srgbClr val="1F2937"/>
-            </a:solidFill>
-            <a:prstDash val="solid"/>
-          </a:ln>
-        </p:spPr>
-      </p:sp>
-      <p:sp>
-        <p:nvSpPr>
-          <p:cNvPr id="26" name="S03-mark61"/>
-          <p:cNvSpPr/>
-          <p:nvPr/>
-        </p:nvSpPr>
-        <p:spPr>
-          <a:xfrm flipH="1">
-            <a:off x="8436758" y="2485498"/>
-            <a:ext cx="717199" cy="134475"/>
-          </a:xfrm>
-          <a:prstGeom prst="line">
-            <a:avLst/>
-          </a:prstGeom>
-          <a:noFill/>
-          <a:ln w="22225">
-            <a:solidFill>
-              <a:srgbClr val="1F2937"/>
-            </a:solidFill>
-            <a:prstDash val="dash"/>
-          </a:ln>
-        </p:spPr>
-      </p:sp>
-      <p:sp>
-        <p:nvSpPr>
-          <p:cNvPr id="27" name="S03-mark62"/>
-          <p:cNvSpPr/>
-          <p:nvPr/>
-        </p:nvSpPr>
-        <p:spPr>
-          <a:xfrm flipH="1">
-            <a:off x="8366831" y="2619973"/>
-            <a:ext cx="69927" cy="216953"/>
-          </a:xfrm>
-          <a:prstGeom prst="line">
-            <a:avLst/>
-          </a:prstGeom>
-          <a:noFill/>
-          <a:ln w="22225">
-            <a:solidFill>
-              <a:srgbClr val="1F2937"/>
-            </a:solidFill>
-            <a:prstDash val="dash"/>
-          </a:ln>
-        </p:spPr>
-      </p:sp>
-      <p:sp>
-        <p:nvSpPr>
-          <p:cNvPr id="28" name="S03-mark63"/>
-          <p:cNvSpPr/>
-          <p:nvPr/>
-        </p:nvSpPr>
-        <p:spPr>
-          <a:xfrm>
-            <a:off x="9153957" y="2485498"/>
-            <a:ext cx="374019" cy="134475"/>
-          </a:xfrm>
-          <a:prstGeom prst="line">
-            <a:avLst/>
-          </a:prstGeom>
-          <a:noFill/>
-          <a:ln w="22225">
-            <a:solidFill>
-              <a:srgbClr val="1F2937"/>
-            </a:solidFill>
-            <a:prstDash val="dash"/>
-          </a:ln>
-        </p:spPr>
-      </p:sp>
-      <p:sp>
-        <p:nvSpPr>
-          <p:cNvPr id="29" name="S03-mark64"/>
-          <p:cNvSpPr/>
-          <p:nvPr/>
-        </p:nvSpPr>
-        <p:spPr>
-          <a:xfrm flipV="1">
-            <a:off x="8436758" y="1544175"/>
-            <a:ext cx="0" cy="1075798"/>
-          </a:xfrm>
-          <a:prstGeom prst="line">
-            <a:avLst/>
-          </a:prstGeom>
-          <a:noFill/>
-          <a:ln w="22225">
-            <a:solidFill>
-              <a:srgbClr val="1F2937"/>
-            </a:solidFill>
-            <a:prstDash val="dash"/>
-          </a:ln>
-        </p:spPr>
-      </p:sp>
-      <p:sp>
-        <p:nvSpPr>
-          <p:cNvPr id="30" name="S03-mark65"/>
-          <p:cNvSpPr/>
-          <p:nvPr/>
-        </p:nvSpPr>
-        <p:spPr>
-          <a:xfrm flipV="1">
-            <a:off x="9153957" y="1409700"/>
-            <a:ext cx="0" cy="1075798"/>
-          </a:xfrm>
-          <a:prstGeom prst="line">
-            <a:avLst/>
-          </a:prstGeom>
-          <a:noFill/>
-          <a:ln w="22225">
-            <a:solidFill>
-              <a:srgbClr val="1F2937"/>
-            </a:solidFill>
-            <a:prstDash val="dash"/>
-          </a:ln>
-        </p:spPr>
-      </p:sp>
-      <p:sp>
-        <p:nvSpPr>
-          <p:cNvPr id="31" name="S03-mark66"/>
-          <p:cNvSpPr/>
-          <p:nvPr/>
-        </p:nvSpPr>
-        <p:spPr>
-          <a:xfrm>
-            <a:off x="8366831" y="2836926"/>
-            <a:ext cx="674526" cy="0"/>
-          </a:xfrm>
-          <a:prstGeom prst="line">
-            <a:avLst/>
-          </a:prstGeom>
-          <a:noFill/>
-          <a:ln w="28575">
-            <a:solidFill>
-              <a:srgbClr val="1F2937"/>
-            </a:solidFill>
-            <a:prstDash val="solid"/>
-          </a:ln>
-        </p:spPr>
-      </p:sp>
-      <p:sp>
-        <p:nvSpPr>
-          <p:cNvPr id="32" name="S03-mark67"/>
-          <p:cNvSpPr/>
-          <p:nvPr/>
-        </p:nvSpPr>
-        <p:spPr>
-          <a:xfrm flipV="1">
-            <a:off x="9041357" y="2619973"/>
-            <a:ext cx="486620" cy="216953"/>
-          </a:xfrm>
-          <a:prstGeom prst="line">
-            <a:avLst/>
-          </a:prstGeom>
-          <a:noFill/>
-          <a:ln w="28575">
-            <a:solidFill>
-              <a:srgbClr val="1F2937"/>
-            </a:solidFill>
-            <a:prstDash val="solid"/>
-          </a:ln>
-        </p:spPr>
-      </p:sp>
-      <p:sp>
-        <p:nvSpPr>
-          <p:cNvPr id="33" name="S03-mark68"/>
-          <p:cNvSpPr/>
-          <p:nvPr/>
-        </p:nvSpPr>
-        <p:spPr>
-          <a:xfrm flipH="1">
-            <a:off x="8436758" y="1409700"/>
-            <a:ext cx="717199" cy="134475"/>
-          </a:xfrm>
-          <a:prstGeom prst="line">
-            <a:avLst/>
-          </a:prstGeom>
-          <a:noFill/>
-          <a:ln w="28575">
-            <a:solidFill>
-              <a:srgbClr val="1F2937"/>
-            </a:solidFill>
-            <a:prstDash val="solid"/>
-          </a:ln>
-        </p:spPr>
-      </p:sp>
-      <p:sp>
-        <p:nvSpPr>
-          <p:cNvPr id="34" name="S03-mark69"/>
-          <p:cNvSpPr/>
-          <p:nvPr/>
-        </p:nvSpPr>
-        <p:spPr>
-          <a:xfrm flipH="1">
-            <a:off x="8366831" y="1544175"/>
-            <a:ext cx="69927" cy="216953"/>
-          </a:xfrm>
-          <a:prstGeom prst="line">
-            <a:avLst/>
-          </a:prstGeom>
-          <a:noFill/>
-          <a:ln w="28575">
-            <a:solidFill>
-              <a:srgbClr val="1F2937"/>
-            </a:solidFill>
-            <a:prstDash val="solid"/>
-          </a:ln>
-        </p:spPr>
-      </p:sp>
-      <p:sp>
-        <p:nvSpPr>
-          <p:cNvPr id="35" name="S03-mark70"/>
-          <p:cNvSpPr/>
-          <p:nvPr/>
-        </p:nvSpPr>
-        <p:spPr>
-          <a:xfrm>
-            <a:off x="8366831" y="1761128"/>
-            <a:ext cx="674526" cy="0"/>
-          </a:xfrm>
-          <a:prstGeom prst="line">
-            <a:avLst/>
-          </a:prstGeom>
-          <a:noFill/>
-          <a:ln w="28575">
-            <a:solidFill>
-              <a:srgbClr val="1F2937"/>
-            </a:solidFill>
-            <a:prstDash val="solid"/>
-          </a:ln>
-        </p:spPr>
-      </p:sp>
-      <p:sp>
-        <p:nvSpPr>
-          <p:cNvPr id="36" name="S03-mark71"/>
-          <p:cNvSpPr/>
-          <p:nvPr/>
-        </p:nvSpPr>
-        <p:spPr>
-          <a:xfrm flipV="1">
-            <a:off x="9041357" y="1544175"/>
-            <a:ext cx="486620" cy="216953"/>
-          </a:xfrm>
-          <a:prstGeom prst="line">
-            <a:avLst/>
-          </a:prstGeom>
-          <a:noFill/>
-          <a:ln w="28575">
-            <a:solidFill>
-              <a:srgbClr val="1F2937"/>
-            </a:solidFill>
-            <a:prstDash val="solid"/>
-          </a:ln>
-        </p:spPr>
-      </p:sp>
-      <p:sp>
-        <p:nvSpPr>
-          <p:cNvPr id="37" name="S03-mark72"/>
-          <p:cNvSpPr/>
-          <p:nvPr/>
-        </p:nvSpPr>
-        <p:spPr>
-          <a:xfrm>
-            <a:off x="9153957" y="1409700"/>
-            <a:ext cx="374019" cy="134475"/>
-          </a:xfrm>
-          <a:prstGeom prst="line">
-            <a:avLst/>
-          </a:prstGeom>
-          <a:noFill/>
-          <a:ln w="28575">
-            <a:solidFill>
-              <a:srgbClr val="1F2937"/>
-            </a:solidFill>
-            <a:prstDash val="solid"/>
-          </a:ln>
-        </p:spPr>
-      </p:sp>
-      <p:sp>
-        <p:nvSpPr>
-          <p:cNvPr id="38" name="S03-mark73"/>
-          <p:cNvSpPr/>
-          <p:nvPr/>
-        </p:nvSpPr>
-        <p:spPr>
-          <a:xfrm flipV="1">
-            <a:off x="8366831" y="1761128"/>
-            <a:ext cx="0" cy="1075798"/>
-          </a:xfrm>
-          <a:prstGeom prst="line">
-            <a:avLst/>
-          </a:prstGeom>
-          <a:noFill/>
-          <a:ln w="28575">
-            <a:solidFill>
-              <a:srgbClr val="1F2937"/>
-            </a:solidFill>
-            <a:prstDash val="solid"/>
-          </a:ln>
-        </p:spPr>
-      </p:sp>
-      <p:sp>
-        <p:nvSpPr>
-          <p:cNvPr id="39" name="S03-mark74"/>
-          <p:cNvSpPr/>
-          <p:nvPr/>
-        </p:nvSpPr>
-        <p:spPr>
-          <a:xfrm flipV="1">
-            <a:off x="9041357" y="1761128"/>
-            <a:ext cx="0" cy="1075798"/>
-          </a:xfrm>
-          <a:prstGeom prst="line">
-            <a:avLst/>
-          </a:prstGeom>
-          <a:noFill/>
-          <a:ln w="28575">
-            <a:solidFill>
-              <a:srgbClr val="1F2937"/>
-            </a:solidFill>
-            <a:prstDash val="solid"/>
-          </a:ln>
-        </p:spPr>
-      </p:sp>
-      <p:sp>
-        <p:nvSpPr>
-          <p:cNvPr id="40" name="S03-mark75"/>
-          <p:cNvSpPr/>
-          <p:nvPr/>
-        </p:nvSpPr>
-        <p:spPr>
-          <a:xfrm flipV="1">
-            <a:off x="9527977" y="1544175"/>
-            <a:ext cx="0" cy="1075798"/>
-          </a:xfrm>
-          <a:prstGeom prst="line">
-            <a:avLst/>
-          </a:prstGeom>
-          <a:noFill/>
-          <a:ln w="28575">
-            <a:solidFill>
-              <a:srgbClr val="1F2937"/>
-            </a:solidFill>
-            <a:prstDash val="solid"/>
-          </a:ln>
-        </p:spPr>
-      </p:sp>
-      <p:sp>
-        <p:nvSpPr>
-          <p:cNvPr id="41" name="S03-label76"/>
-          <p:cNvSpPr txBox="1"/>
-          <p:nvPr/>
-        </p:nvSpPr>
-        <p:spPr>
-          <a:xfrm>
-            <a:off x="6254496" y="2993898"/>
-            <a:ext cx="5385816" cy="377190"/>
-          </a:xfrm>
-          <a:prstGeom prst="rect">
-            <a:avLst/>
-          </a:prstGeom>
-          <a:noFill/>
-          <a:ln/>
-        </p:spPr>
-        <p:txBody>
-          <a:bodyPr wrap="square" lIns="0" tIns="0" rIns="0" bIns="0" rtlCol="0" anchor="ctr"/>
-          <a:lstStyle/>
-          <a:p>
-            <a:pPr eaLnBrk="0" algn="ctr" indent="0" marL="0">
+              <a:t>밑면</a:t>
+            </a:r>
+            <a:endParaRPr lang="ko-KR" sz="2800" dirty="0"/>
+          </a:p>
+          <a:p>
+            <a:pPr eaLnBrk="0" indent="0" marL="0">
+              <a:spcAft>
+                <a:spcPts val="600"/>
+              </a:spcAft>
               <a:buNone/>
             </a:pPr>
             <a:r>
-              <a:rPr lang="ko-KR" altLang="en-US" sz="2200" b="1" dirty="0">
+              <a:rPr lang="ko-KR" altLang="en-US" sz="2200" dirty="0">
                 <a:solidFill>
                   <a:srgbClr val="1F2937"/>
                 </a:solidFill>
@@ -11835,9 +11185,138 @@
                 <a:ea typeface="맑은 고딕" pitchFamily="34" charset="-122"/>
                 <a:cs typeface="맑은 고딕" pitchFamily="34" charset="-120"/>
               </a:rPr>
-              <a:t>오각기둥</a:t>
-            </a:r>
-            <a:endParaRPr lang="ko-KR" sz="2200" dirty="0"/>
+              <a:t>서로 평행하고</a:t>
+            </a:r>
+            <a:endParaRPr lang="ko-KR" sz="2800" dirty="0"/>
+          </a:p>
+          <a:p>
+            <a:pPr eaLnBrk="0" indent="0" marL="0">
+              <a:spcAft>
+                <a:spcPts val="600"/>
+              </a:spcAft>
+              <a:buNone/>
+            </a:pPr>
+            <a:r>
+              <a:rPr lang="ko-KR" altLang="en-US" sz="2200" dirty="0">
+                <a:solidFill>
+                  <a:srgbClr val="1F2937"/>
+                </a:solidFill>
+                <a:latin typeface="맑은 고딕" pitchFamily="34" charset="0"/>
+                <a:ea typeface="맑은 고딕" pitchFamily="34" charset="-122"/>
+                <a:cs typeface="맑은 고딕" pitchFamily="34" charset="-120"/>
+              </a:rPr>
+              <a:t>합동인 두 면</a:t>
+            </a:r>
+            <a:endParaRPr lang="ko-KR" sz="2800" dirty="0"/>
+          </a:p>
+        </p:txBody>
+      </p:sp>
+      <p:sp>
+        <p:nvSpPr>
+          <p:cNvPr id="21" name="S03-card56"/>
+          <p:cNvSpPr/>
+          <p:nvPr/>
+        </p:nvSpPr>
+        <p:spPr>
+          <a:xfrm>
+            <a:off x="5741060" y="3337560"/>
+            <a:ext cx="5899252" cy="1520952"/>
+          </a:xfrm>
+          <a:prstGeom prst="roundRect">
+            <a:avLst>
+              <a:gd name="adj" fmla="val 7214"/>
+            </a:avLst>
+          </a:prstGeom>
+          <a:solidFill>
+            <a:srgbClr val="EAF3F1"/>
+          </a:solidFill>
+          <a:ln w="12700">
+            <a:solidFill>
+              <a:srgbClr val="EAF3F1"/>
+            </a:solidFill>
+            <a:prstDash val="solid"/>
+          </a:ln>
+        </p:spPr>
+      </p:sp>
+      <p:sp>
+        <p:nvSpPr>
+          <p:cNvPr id="22" name="S03-cardtext57"/>
+          <p:cNvSpPr txBox="1"/>
+          <p:nvPr/>
+        </p:nvSpPr>
+        <p:spPr>
+          <a:xfrm>
+            <a:off x="6015380" y="3474720"/>
+            <a:ext cx="5350612" cy="1246632"/>
+          </a:xfrm>
+          <a:prstGeom prst="rect">
+            <a:avLst/>
+          </a:prstGeom>
+          <a:noFill/>
+          <a:ln/>
+        </p:spPr>
+        <p:txBody>
+          <a:bodyPr wrap="square" lIns="0" tIns="0" rIns="0" bIns="0" rtlCol="0" anchor="ctr"/>
+          <a:lstStyle/>
+          <a:p>
+            <a:pPr eaLnBrk="0" indent="0" marL="0">
+              <a:spcAft>
+                <a:spcPts val="600"/>
+              </a:spcAft>
+              <a:buNone/>
+            </a:pPr>
+            <a:r>
+              <a:rPr lang="ko-KR" altLang="en-US" sz="2800" b="1" dirty="0">
+                <a:solidFill>
+                  <a:srgbClr val="1F2937"/>
+                </a:solidFill>
+                <a:latin typeface="맑은 고딕" pitchFamily="34" charset="0"/>
+                <a:ea typeface="맑은 고딕" pitchFamily="34" charset="-122"/>
+                <a:cs typeface="맑은 고딕" pitchFamily="34" charset="-120"/>
+              </a:rPr>
+              <a:t>옆면</a:t>
+            </a:r>
+            <a:endParaRPr lang="ko-KR" sz="2800" dirty="0"/>
+          </a:p>
+          <a:p>
+            <a:pPr eaLnBrk="0" indent="0" marL="0">
+              <a:spcAft>
+                <a:spcPts val="600"/>
+              </a:spcAft>
+              <a:buNone/>
+            </a:pPr>
+            <a:r>
+              <a:rPr lang="ko-KR" altLang="en-US" sz="2200" dirty="0">
+                <a:solidFill>
+                  <a:srgbClr val="1F2937"/>
+                </a:solidFill>
+                <a:latin typeface="맑은 고딕" pitchFamily="34" charset="0"/>
+                <a:ea typeface="맑은 고딕" pitchFamily="34" charset="-122"/>
+                <a:cs typeface="맑은 고딕" pitchFamily="34" charset="-120"/>
+              </a:rPr>
+              <a:t>두 밑면과 만나는 면</a:t>
+            </a:r>
+            <a:endParaRPr lang="ko-KR" sz="2800" dirty="0"/>
+          </a:p>
+          <a:p>
+            <a:pPr eaLnBrk="0" indent="0" marL="0">
+              <a:spcAft>
+                <a:spcPts val="600"/>
+              </a:spcAft>
+              <a:buNone/>
+            </a:pPr>
+            <a:r>
+              <a:rPr lang="ko-KR" altLang="en-US" sz="2200" dirty="0">
+                <a:solidFill>
+                  <a:srgbClr val="1F2937"/>
+                </a:solidFill>
+                <a:latin typeface="맑은 고딕" pitchFamily="34" charset="0"/>
+                <a:ea typeface="맑은 고딕" pitchFamily="34" charset="-122"/>
+                <a:cs typeface="맑은 고딕" pitchFamily="34" charset="-120"/>
+              </a:rPr>
+              <a:t>모두 직사각형</a:t>
+            </a:r>
+            <a:endParaRPr lang="ko-KR" sz="2800" dirty="0"/>
           </a:p>
         </p:txBody>
       </p:sp>
@@ -11957,14 +11436,14 @@
       </p:sp>
       <p:sp>
         <p:nvSpPr>
-          <p:cNvPr id="3" name="S04-figure77" descr="오각기둥: 꼭짓점 하나에 점, 모서리 하나를 굵게, 두 밑면 사이에 높이 화살표"/>
+          <p:cNvPr id="3" name="S04-figure58" descr="오각기둥: 꼭짓점 하나에 점, 모서리 하나를 굵게, 두 밑면 사이에 높이 화살표"/>
           <p:cNvSpPr/>
           <p:nvPr/>
         </p:nvSpPr>
         <p:spPr>
           <a:xfrm flipH="1">
-            <a:off x="2001594" y="4678607"/>
-            <a:ext cx="1795460" cy="336649"/>
+            <a:off x="1866473" y="4695444"/>
+            <a:ext cx="1828800" cy="342900"/>
           </a:xfrm>
           <a:prstGeom prst="line">
             <a:avLst/>
@@ -11980,14 +11459,14 @@
       </p:sp>
       <p:sp>
         <p:nvSpPr>
-          <p:cNvPr id="4" name="S04-mark78"/>
+          <p:cNvPr id="4" name="S04-mark59"/>
           <p:cNvSpPr/>
           <p:nvPr/>
         </p:nvSpPr>
         <p:spPr>
           <a:xfrm flipH="1">
-            <a:off x="1826537" y="5015256"/>
-            <a:ext cx="175057" cy="543127"/>
+            <a:off x="1688165" y="5038344"/>
+            <a:ext cx="178308" cy="553212"/>
           </a:xfrm>
           <a:prstGeom prst="line">
             <a:avLst/>
@@ -12003,14 +11482,14 @@
       </p:sp>
       <p:sp>
         <p:nvSpPr>
-          <p:cNvPr id="5" name="S04-mark79"/>
-          <p:cNvSpPr/>
-          <p:nvPr/>
-        </p:nvSpPr>
-        <p:spPr>
-          <a:xfrm>
-            <a:off x="3797054" y="4678607"/>
-            <a:ext cx="936332" cy="336649"/>
+          <p:cNvPr id="5" name="S04-mark60"/>
+          <p:cNvSpPr/>
+          <p:nvPr/>
+        </p:nvSpPr>
+        <p:spPr>
+          <a:xfrm>
+            <a:off x="3695273" y="4695444"/>
+            <a:ext cx="953719" cy="342900"/>
           </a:xfrm>
           <a:prstGeom prst="line">
             <a:avLst/>
@@ -12026,14 +11505,14 @@
       </p:sp>
       <p:sp>
         <p:nvSpPr>
-          <p:cNvPr id="6" name="S04-mark80"/>
+          <p:cNvPr id="6" name="S04-mark61"/>
           <p:cNvSpPr/>
           <p:nvPr/>
         </p:nvSpPr>
         <p:spPr>
           <a:xfrm flipV="1">
-            <a:off x="2001594" y="2322066"/>
-            <a:ext cx="0" cy="2693190"/>
+            <a:off x="1866473" y="2295144"/>
+            <a:ext cx="0" cy="2743200"/>
           </a:xfrm>
           <a:prstGeom prst="line">
             <a:avLst/>
@@ -12049,14 +11528,14 @@
       </p:sp>
       <p:sp>
         <p:nvSpPr>
-          <p:cNvPr id="7" name="S04-mark81"/>
+          <p:cNvPr id="7" name="S04-mark62"/>
           <p:cNvSpPr/>
           <p:nvPr/>
         </p:nvSpPr>
         <p:spPr>
           <a:xfrm flipV="1">
-            <a:off x="3797054" y="1985417"/>
-            <a:ext cx="0" cy="2693190"/>
+            <a:off x="3695273" y="1952244"/>
+            <a:ext cx="0" cy="2743200"/>
           </a:xfrm>
           <a:prstGeom prst="line">
             <a:avLst/>
@@ -12072,14 +11551,14 @@
       </p:sp>
       <p:sp>
         <p:nvSpPr>
-          <p:cNvPr id="8" name="S04-mark82"/>
-          <p:cNvSpPr/>
-          <p:nvPr/>
-        </p:nvSpPr>
-        <p:spPr>
-          <a:xfrm>
-            <a:off x="1826537" y="5558383"/>
-            <a:ext cx="1688630" cy="0"/>
+          <p:cNvPr id="8" name="S04-mark63"/>
+          <p:cNvSpPr/>
+          <p:nvPr/>
+        </p:nvSpPr>
+        <p:spPr>
+          <a:xfrm>
+            <a:off x="1688165" y="5591556"/>
+            <a:ext cx="1719986" cy="0"/>
           </a:xfrm>
           <a:prstGeom prst="line">
             <a:avLst/>
@@ -12095,14 +11574,14 @@
       </p:sp>
       <p:sp>
         <p:nvSpPr>
-          <p:cNvPr id="9" name="S04-mark83"/>
+          <p:cNvPr id="9" name="S04-mark64"/>
           <p:cNvSpPr/>
           <p:nvPr/>
         </p:nvSpPr>
         <p:spPr>
           <a:xfrm flipV="1">
-            <a:off x="3515167" y="5015256"/>
-            <a:ext cx="1218220" cy="543127"/>
+            <a:off x="3408152" y="5038344"/>
+            <a:ext cx="1240841" cy="553212"/>
           </a:xfrm>
           <a:prstGeom prst="line">
             <a:avLst/>
@@ -12118,14 +11597,14 @@
       </p:sp>
       <p:sp>
         <p:nvSpPr>
-          <p:cNvPr id="10" name="S04-mark84"/>
+          <p:cNvPr id="10" name="S04-mark65"/>
           <p:cNvSpPr/>
           <p:nvPr/>
         </p:nvSpPr>
         <p:spPr>
           <a:xfrm flipH="1">
-            <a:off x="2001594" y="1985417"/>
-            <a:ext cx="1795460" cy="336649"/>
+            <a:off x="1866473" y="1952244"/>
+            <a:ext cx="1828800" cy="342900"/>
           </a:xfrm>
           <a:prstGeom prst="line">
             <a:avLst/>
@@ -12141,14 +11620,14 @@
       </p:sp>
       <p:sp>
         <p:nvSpPr>
-          <p:cNvPr id="11" name="S04-mark85"/>
+          <p:cNvPr id="11" name="S04-mark66"/>
           <p:cNvSpPr/>
           <p:nvPr/>
         </p:nvSpPr>
         <p:spPr>
           <a:xfrm flipH="1">
-            <a:off x="1826537" y="2322066"/>
-            <a:ext cx="175057" cy="543127"/>
+            <a:off x="1688165" y="2295144"/>
+            <a:ext cx="178308" cy="553212"/>
           </a:xfrm>
           <a:prstGeom prst="line">
             <a:avLst/>
@@ -12164,14 +11643,14 @@
       </p:sp>
       <p:sp>
         <p:nvSpPr>
-          <p:cNvPr id="12" name="S04-mark86"/>
-          <p:cNvSpPr/>
-          <p:nvPr/>
-        </p:nvSpPr>
-        <p:spPr>
-          <a:xfrm>
-            <a:off x="1826537" y="2865193"/>
-            <a:ext cx="1688630" cy="0"/>
+          <p:cNvPr id="12" name="S04-mark67"/>
+          <p:cNvSpPr/>
+          <p:nvPr/>
+        </p:nvSpPr>
+        <p:spPr>
+          <a:xfrm>
+            <a:off x="1688165" y="2848356"/>
+            <a:ext cx="1719986" cy="0"/>
           </a:xfrm>
           <a:prstGeom prst="line">
             <a:avLst/>
@@ -12187,14 +11666,14 @@
       </p:sp>
       <p:sp>
         <p:nvSpPr>
-          <p:cNvPr id="13" name="S04-mark87"/>
+          <p:cNvPr id="13" name="S04-mark68"/>
           <p:cNvSpPr/>
           <p:nvPr/>
         </p:nvSpPr>
         <p:spPr>
           <a:xfrm flipV="1">
-            <a:off x="3515167" y="2322066"/>
-            <a:ext cx="1218220" cy="543127"/>
+            <a:off x="3408152" y="2295144"/>
+            <a:ext cx="1240841" cy="553212"/>
           </a:xfrm>
           <a:prstGeom prst="line">
             <a:avLst/>
@@ -12210,14 +11689,14 @@
       </p:sp>
       <p:sp>
         <p:nvSpPr>
-          <p:cNvPr id="14" name="S04-mark88"/>
-          <p:cNvSpPr/>
-          <p:nvPr/>
-        </p:nvSpPr>
-        <p:spPr>
-          <a:xfrm>
-            <a:off x="3797054" y="1985417"/>
-            <a:ext cx="936332" cy="336649"/>
+          <p:cNvPr id="14" name="S04-mark69"/>
+          <p:cNvSpPr/>
+          <p:nvPr/>
+        </p:nvSpPr>
+        <p:spPr>
+          <a:xfrm>
+            <a:off x="3695273" y="1952244"/>
+            <a:ext cx="953719" cy="342900"/>
           </a:xfrm>
           <a:prstGeom prst="line">
             <a:avLst/>
@@ -12233,14 +11712,14 @@
       </p:sp>
       <p:sp>
         <p:nvSpPr>
-          <p:cNvPr id="15" name="S04-mark89"/>
+          <p:cNvPr id="15" name="S04-mark70"/>
           <p:cNvSpPr/>
           <p:nvPr/>
         </p:nvSpPr>
         <p:spPr>
           <a:xfrm flipV="1">
-            <a:off x="1826537" y="2865193"/>
-            <a:ext cx="0" cy="2693190"/>
+            <a:off x="1688165" y="2848356"/>
+            <a:ext cx="0" cy="2743200"/>
           </a:xfrm>
           <a:prstGeom prst="line">
             <a:avLst/>
@@ -12256,14 +11735,14 @@
       </p:sp>
       <p:sp>
         <p:nvSpPr>
-          <p:cNvPr id="16" name="S04-mark90"/>
+          <p:cNvPr id="16" name="S04-mark71"/>
           <p:cNvSpPr/>
           <p:nvPr/>
         </p:nvSpPr>
         <p:spPr>
           <a:xfrm flipV="1">
-            <a:off x="3515167" y="2865193"/>
-            <a:ext cx="0" cy="2693190"/>
+            <a:off x="3408152" y="2848356"/>
+            <a:ext cx="0" cy="2743200"/>
           </a:xfrm>
           <a:prstGeom prst="line">
             <a:avLst/>
@@ -12279,14 +11758,14 @@
       </p:sp>
       <p:sp>
         <p:nvSpPr>
-          <p:cNvPr id="17" name="S04-mark91"/>
+          <p:cNvPr id="17" name="S04-mark72"/>
           <p:cNvSpPr/>
           <p:nvPr/>
         </p:nvSpPr>
         <p:spPr>
           <a:xfrm flipV="1">
-            <a:off x="4733387" y="2322066"/>
-            <a:ext cx="0" cy="2693190"/>
+            <a:off x="4648992" y="2295144"/>
+            <a:ext cx="0" cy="2743200"/>
           </a:xfrm>
           <a:prstGeom prst="line">
             <a:avLst/>
@@ -12302,14 +11781,14 @@
       </p:sp>
       <p:sp>
         <p:nvSpPr>
-          <p:cNvPr id="18" name="S04-mark92"/>
+          <p:cNvPr id="18" name="S04-mark73"/>
           <p:cNvSpPr/>
           <p:nvPr/>
         </p:nvSpPr>
         <p:spPr>
           <a:xfrm flipV="1">
-            <a:off x="1826537" y="2865193"/>
-            <a:ext cx="0" cy="2693190"/>
+            <a:off x="1688165" y="2848356"/>
+            <a:ext cx="0" cy="2743200"/>
           </a:xfrm>
           <a:prstGeom prst="line">
             <a:avLst/>
@@ -12325,14 +11804,14 @@
       </p:sp>
       <p:sp>
         <p:nvSpPr>
-          <p:cNvPr id="19" name="S04-mark93"/>
+          <p:cNvPr id="19" name="S04-mark74"/>
           <p:cNvSpPr/>
           <p:nvPr/>
         </p:nvSpPr>
         <p:spPr>
           <a:xfrm flipV="1">
-            <a:off x="5361798" y="2471987"/>
-            <a:ext cx="0" cy="2693190"/>
+            <a:off x="5289072" y="2447849"/>
+            <a:ext cx="0" cy="2743200"/>
           </a:xfrm>
           <a:prstGeom prst="line">
             <a:avLst/>
@@ -12350,13 +11829,13 @@
       </p:sp>
       <p:sp>
         <p:nvSpPr>
-          <p:cNvPr id="20" name="S04-label95"/>
+          <p:cNvPr id="20" name="S04-label76"/>
           <p:cNvSpPr txBox="1"/>
           <p:nvPr/>
         </p:nvSpPr>
         <p:spPr>
           <a:xfrm>
-            <a:off x="5390754" y="3643957"/>
+            <a:off x="5318028" y="3644824"/>
             <a:ext cx="657352" cy="349250"/>
           </a:xfrm>
           <a:prstGeom prst="rect">
@@ -12389,13 +11868,13 @@
       </p:sp>
       <p:sp>
         <p:nvSpPr>
-          <p:cNvPr id="21" name="S04-mark96"/>
-          <p:cNvSpPr/>
-          <p:nvPr/>
-        </p:nvSpPr>
-        <p:spPr>
-          <a:xfrm>
-            <a:off x="3455731" y="2805757"/>
+          <p:cNvPr id="21" name="S04-mark77"/>
+          <p:cNvSpPr/>
+          <p:nvPr/>
+        </p:nvSpPr>
+        <p:spPr>
+          <a:xfrm>
+            <a:off x="3348716" y="2788920"/>
             <a:ext cx="118872" cy="118872"/>
           </a:xfrm>
           <a:prstGeom prst="ellipse">
@@ -12414,13 +11893,13 @@
       </p:sp>
       <p:sp>
         <p:nvSpPr>
-          <p:cNvPr id="22" name="S04-label98"/>
+          <p:cNvPr id="22" name="S04-label79"/>
           <p:cNvSpPr txBox="1"/>
           <p:nvPr/>
         </p:nvSpPr>
         <p:spPr>
           <a:xfrm>
-            <a:off x="3229131" y="2196816"/>
+            <a:off x="2119610" y="3085211"/>
             <a:ext cx="931164" cy="349250"/>
           </a:xfrm>
           <a:prstGeom prst="rect">
@@ -12453,13 +11932,13 @@
       </p:sp>
       <p:sp>
         <p:nvSpPr>
-          <p:cNvPr id="23" name="S04-label100"/>
+          <p:cNvPr id="23" name="S04-label81"/>
           <p:cNvSpPr txBox="1"/>
           <p:nvPr/>
         </p:nvSpPr>
         <p:spPr>
           <a:xfrm>
-            <a:off x="418338" y="4037163"/>
+            <a:off x="491063" y="4045331"/>
             <a:ext cx="931164" cy="349250"/>
           </a:xfrm>
           <a:prstGeom prst="rect">
@@ -12492,7 +11971,7 @@
       </p:sp>
       <p:sp>
         <p:nvSpPr>
-          <p:cNvPr id="24" name="S04-card101"/>
+          <p:cNvPr id="24" name="S04-card82"/>
           <p:cNvSpPr/>
           <p:nvPr/>
         </p:nvSpPr>
@@ -12519,7 +11998,7 @@
       </p:sp>
       <p:sp>
         <p:nvSpPr>
-          <p:cNvPr id="25" name="S04-cardtext102"/>
+          <p:cNvPr id="25" name="S04-cardtext83"/>
           <p:cNvSpPr txBox="1"/>
           <p:nvPr/>
         </p:nvSpPr>
@@ -12581,7 +12060,7 @@
       </p:sp>
       <p:sp>
         <p:nvSpPr>
-          <p:cNvPr id="26" name="S04-card103"/>
+          <p:cNvPr id="26" name="S04-card84"/>
           <p:cNvSpPr/>
           <p:nvPr/>
         </p:nvSpPr>
@@ -12608,7 +12087,7 @@
       </p:sp>
       <p:sp>
         <p:nvSpPr>
-          <p:cNvPr id="27" name="S04-cardtext104"/>
+          <p:cNvPr id="27" name="S04-cardtext85"/>
           <p:cNvSpPr txBox="1"/>
           <p:nvPr/>
         </p:nvSpPr>
@@ -12690,7 +12169,7 @@
       </p:sp>
       <p:sp>
         <p:nvSpPr>
-          <p:cNvPr id="28" name="S04-card105"/>
+          <p:cNvPr id="28" name="S04-card86"/>
           <p:cNvSpPr/>
           <p:nvPr/>
         </p:nvSpPr>
@@ -12717,7 +12196,7 @@
       </p:sp>
       <p:sp>
         <p:nvSpPr>
-          <p:cNvPr id="29" name="S04-cardtext106"/>
+          <p:cNvPr id="29" name="S04-cardtext87"/>
           <p:cNvSpPr txBox="1"/>
           <p:nvPr/>
         </p:nvSpPr>
@@ -12893,7 +12372,7 @@
       </p:sp>
       <p:sp>
         <p:nvSpPr>
-          <p:cNvPr id="3" name="S05-text107"/>
+          <p:cNvPr id="3" name="S05-text88"/>
           <p:cNvSpPr txBox="1"/>
           <p:nvPr/>
         </p:nvSpPr>
@@ -12932,7 +12411,7 @@
       </p:sp>
       <p:sp>
         <p:nvSpPr>
-          <p:cNvPr id="4" name="S05-card108"/>
+          <p:cNvPr id="4" name="S05-card89"/>
           <p:cNvSpPr/>
           <p:nvPr/>
         </p:nvSpPr>
@@ -12959,7 +12438,7 @@
       </p:sp>
       <p:sp>
         <p:nvSpPr>
-          <p:cNvPr id="5" name="S05-cardtext109"/>
+          <p:cNvPr id="5" name="S05-cardtext90"/>
           <p:cNvSpPr txBox="1"/>
           <p:nvPr/>
         </p:nvSpPr>
@@ -13021,7 +12500,7 @@
       </p:sp>
       <p:graphicFrame>
         <p:nvGraphicFramePr>
-          <p:cNvPr id="6" name="S05-table110"/>
+          <p:cNvPr id="6" name="S05-table91"/>
           <p:cNvGraphicFramePr>
             <a:graphicFrameLocks noGrp="1"/>
           </p:cNvGraphicFramePr>
@@ -14867,7 +14346,7 @@
       </p:sp>
       <p:sp>
         <p:nvSpPr>
-          <p:cNvPr id="3" name="S06-card111"/>
+          <p:cNvPr id="3" name="S06-card92"/>
           <p:cNvSpPr/>
           <p:nvPr/>
         </p:nvSpPr>
@@ -14894,7 +14373,7 @@
       </p:sp>
       <p:sp>
         <p:nvSpPr>
-          <p:cNvPr id="4" name="S06-cardtext112"/>
+          <p:cNvPr id="4" name="S06-cardtext93"/>
           <p:cNvSpPr txBox="1"/>
           <p:nvPr/>
         </p:nvSpPr>
@@ -14936,7 +14415,7 @@
       </p:sp>
       <p:sp>
         <p:nvSpPr>
-          <p:cNvPr id="5" name="S06-chip113"/>
+          <p:cNvPr id="5" name="S06-chip94"/>
           <p:cNvSpPr txBox="1"/>
           <p:nvPr/>
         </p:nvSpPr>
@@ -14983,7 +14462,7 @@
       </p:sp>
       <p:sp>
         <p:nvSpPr>
-          <p:cNvPr id="6" name="S06-text114"/>
+          <p:cNvPr id="6" name="S06-text95"/>
           <p:cNvSpPr txBox="1"/>
           <p:nvPr/>
         </p:nvSpPr>
@@ -15039,7 +14518,7 @@
       </p:sp>
       <p:sp>
         <p:nvSpPr>
-          <p:cNvPr id="7" name="S06-chip115"/>
+          <p:cNvPr id="7" name="S06-chip96"/>
           <p:cNvSpPr txBox="1"/>
           <p:nvPr/>
         </p:nvSpPr>
@@ -15086,7 +14565,7 @@
       </p:sp>
       <p:sp>
         <p:nvSpPr>
-          <p:cNvPr id="8" name="S06-text116"/>
+          <p:cNvPr id="8" name="S06-text97"/>
           <p:cNvSpPr txBox="1"/>
           <p:nvPr/>
         </p:nvSpPr>
@@ -15142,7 +14621,7 @@
       </p:sp>
       <p:sp>
         <p:nvSpPr>
-          <p:cNvPr id="9" name="S06-chip117"/>
+          <p:cNvPr id="9" name="S06-chip98"/>
           <p:cNvSpPr txBox="1"/>
           <p:nvPr/>
         </p:nvSpPr>
@@ -15189,7 +14668,7 @@
       </p:sp>
       <p:sp>
         <p:nvSpPr>
-          <p:cNvPr id="10" name="S06-text118"/>
+          <p:cNvPr id="10" name="S06-text99"/>
           <p:cNvSpPr txBox="1"/>
           <p:nvPr/>
         </p:nvSpPr>
@@ -15245,7 +14724,7 @@
       </p:sp>
       <p:sp>
         <p:nvSpPr>
-          <p:cNvPr id="11" name="S06-chip119"/>
+          <p:cNvPr id="11" name="S06-chip100"/>
           <p:cNvSpPr txBox="1"/>
           <p:nvPr/>
         </p:nvSpPr>
@@ -15292,7 +14771,7 @@
       </p:sp>
       <p:sp>
         <p:nvSpPr>
-          <p:cNvPr id="12" name="S06-text120"/>
+          <p:cNvPr id="12" name="S06-text101"/>
           <p:cNvSpPr txBox="1"/>
           <p:nvPr/>
         </p:nvSpPr>
@@ -15462,7 +14941,7 @@
       </p:sp>
       <p:sp>
         <p:nvSpPr>
-          <p:cNvPr id="3" name="S07-card121"/>
+          <p:cNvPr id="3" name="S07-card102"/>
           <p:cNvSpPr/>
           <p:nvPr/>
         </p:nvSpPr>
@@ -15489,7 +14968,7 @@
       </p:sp>
       <p:sp>
         <p:nvSpPr>
-          <p:cNvPr id="4" name="S07-cardtext122"/>
+          <p:cNvPr id="4" name="S07-cardtext103"/>
           <p:cNvSpPr txBox="1"/>
           <p:nvPr/>
         </p:nvSpPr>
@@ -15523,7 +15002,7 @@
                 <a:ea typeface="맑은 고딕" pitchFamily="34" charset="-122"/>
                 <a:cs typeface="맑은 고딕" pitchFamily="34" charset="-120"/>
               </a:rPr>
-              <a:t>밑면의 모양에 따라 삼각뿔, 사각뿔, 오각뿔 …이라고 해요.</a:t>
+              <a:t>높이: 각뿔의 꼭짓점에서 밑면에 수직으로 그은 파란 점선의 길이</a:t>
             </a:r>
             <a:endParaRPr lang="ko-KR" sz="2800" dirty="0"/>
           </a:p>
@@ -15531,7 +15010,7 @@
       </p:sp>
       <p:sp>
         <p:nvSpPr>
-          <p:cNvPr id="5" name="S07-figure123" descr="사각뿔의 겨냥도: 밑면(사각형) 색칠, 앞 옆면(삼각형) 옅게 색칠, 꼭짓점에서 밑면까지 높이(점선)"/>
+          <p:cNvPr id="5" name="S07-figure104" descr="사각뿔의 겨냥도: 밑면(사각형) 색칠, 각뿔의 꼭짓점에 점, 꼭짓점에서 밑면까지 높이(파란 점선)"/>
           <p:cNvSpPr/>
           <p:nvPr/>
         </p:nvSpPr>
@@ -15577,50 +15056,30 @@
       </p:sp>
       <p:sp>
         <p:nvSpPr>
-          <p:cNvPr id="6" name="S07-mark124"/>
-          <p:cNvSpPr/>
-          <p:nvPr/>
-        </p:nvSpPr>
-        <p:spPr>
-          <a:xfrm>
-            <a:off x="1188355" y="1799247"/>
-            <a:ext cx="2250719" cy="2977874"/>
-          </a:xfrm>
-          <a:custGeom>
-            <a:avLst/>
-            <a:gdLst/>
-            <a:ahLst/>
-            <a:cxnLst/>
-            <a:rect l="l" t="t" r="r" b="b"/>
-            <a:pathLst>
-              <a:path w="2250719" h="2977874">
-                <a:moveTo>
-                  <a:pt x="0" y="2977874"/>
-                </a:moveTo>
-                <a:lnTo>
-                  <a:pt x="2250719" y="2977874"/>
-                </a:lnTo>
-                <a:lnTo>
-                  <a:pt x="1612727" y="0"/>
-                </a:lnTo>
-                <a:close/>
-              </a:path>
-            </a:pathLst>
-          </a:custGeom>
-          <a:solidFill>
-            <a:srgbClr val="FDEBDD"/>
-          </a:solidFill>
-          <a:ln w="28575">
-            <a:solidFill>
-              <a:srgbClr val="1F2937"/>
-            </a:solidFill>
-            <a:prstDash val="solid"/>
-          </a:ln>
-        </p:spPr>
-      </p:sp>
-      <p:sp>
-        <p:nvSpPr>
-          <p:cNvPr id="7" name="S07-mark125"/>
+          <p:cNvPr id="6" name="S07-mark105"/>
+          <p:cNvSpPr/>
+          <p:nvPr/>
+        </p:nvSpPr>
+        <p:spPr>
+          <a:xfrm>
+            <a:off x="2801082" y="1799247"/>
+            <a:ext cx="0" cy="2596983"/>
+          </a:xfrm>
+          <a:prstGeom prst="line">
+            <a:avLst/>
+          </a:prstGeom>
+          <a:noFill/>
+          <a:ln w="31750">
+            <a:solidFill>
+              <a:srgbClr val="3D5A80"/>
+            </a:solidFill>
+            <a:prstDash val="dash"/>
+          </a:ln>
+        </p:spPr>
+      </p:sp>
+      <p:sp>
+        <p:nvSpPr>
+          <p:cNvPr id="7" name="S07-mark106"/>
           <p:cNvSpPr/>
           <p:nvPr/>
         </p:nvSpPr>
@@ -15643,7 +15102,7 @@
       </p:sp>
       <p:sp>
         <p:nvSpPr>
-          <p:cNvPr id="8" name="S07-mark126"/>
+          <p:cNvPr id="8" name="S07-mark107"/>
           <p:cNvSpPr/>
           <p:nvPr/>
         </p:nvSpPr>
@@ -15666,7 +15125,7 @@
       </p:sp>
       <p:sp>
         <p:nvSpPr>
-          <p:cNvPr id="9" name="S07-mark127"/>
+          <p:cNvPr id="9" name="S07-mark108"/>
           <p:cNvSpPr/>
           <p:nvPr/>
         </p:nvSpPr>
@@ -15689,7 +15148,7 @@
       </p:sp>
       <p:sp>
         <p:nvSpPr>
-          <p:cNvPr id="10" name="S07-mark128"/>
+          <p:cNvPr id="10" name="S07-mark109"/>
           <p:cNvSpPr/>
           <p:nvPr/>
         </p:nvSpPr>
@@ -15712,7 +15171,7 @@
       </p:sp>
       <p:sp>
         <p:nvSpPr>
-          <p:cNvPr id="11" name="S07-mark129"/>
+          <p:cNvPr id="11" name="S07-mark110"/>
           <p:cNvSpPr/>
           <p:nvPr/>
         </p:nvSpPr>
@@ -15735,7 +15194,7 @@
       </p:sp>
       <p:sp>
         <p:nvSpPr>
-          <p:cNvPr id="12" name="S07-mark130"/>
+          <p:cNvPr id="12" name="S07-mark111"/>
           <p:cNvSpPr/>
           <p:nvPr/>
         </p:nvSpPr>
@@ -15758,7 +15217,7 @@
       </p:sp>
       <p:sp>
         <p:nvSpPr>
-          <p:cNvPr id="13" name="S07-mark131"/>
+          <p:cNvPr id="13" name="S07-mark112"/>
           <p:cNvSpPr/>
           <p:nvPr/>
         </p:nvSpPr>
@@ -15781,7 +15240,7 @@
       </p:sp>
       <p:sp>
         <p:nvSpPr>
-          <p:cNvPr id="14" name="S07-mark132"/>
+          <p:cNvPr id="14" name="S07-mark113"/>
           <p:cNvSpPr/>
           <p:nvPr/>
         </p:nvSpPr>
@@ -15804,30 +15263,7 @@
       </p:sp>
       <p:sp>
         <p:nvSpPr>
-          <p:cNvPr id="15" name="S07-mark133"/>
-          <p:cNvSpPr/>
-          <p:nvPr/>
-        </p:nvSpPr>
-        <p:spPr>
-          <a:xfrm>
-            <a:off x="2801082" y="1799247"/>
-            <a:ext cx="0" cy="2596983"/>
-          </a:xfrm>
-          <a:prstGeom prst="line">
-            <a:avLst/>
-          </a:prstGeom>
-          <a:noFill/>
-          <a:ln w="31750">
-            <a:solidFill>
-              <a:srgbClr val="3D5A80"/>
-            </a:solidFill>
-            <a:prstDash val="dash"/>
-          </a:ln>
-        </p:spPr>
-      </p:sp>
-      <p:sp>
-        <p:nvSpPr>
-          <p:cNvPr id="16" name="S07-mark134"/>
+          <p:cNvPr id="15" name="S07-mark114"/>
           <p:cNvSpPr/>
           <p:nvPr/>
         </p:nvSpPr>
@@ -15852,7 +15288,7 @@
       </p:sp>
       <p:sp>
         <p:nvSpPr>
-          <p:cNvPr id="17" name="S07-label136"/>
+          <p:cNvPr id="16" name="S07-label116"/>
           <p:cNvSpPr txBox="1"/>
           <p:nvPr/>
         </p:nvSpPr>
@@ -15891,46 +15327,7 @@
       </p:sp>
       <p:sp>
         <p:nvSpPr>
-          <p:cNvPr id="18" name="S07-label138"/>
-          <p:cNvSpPr txBox="1"/>
-          <p:nvPr/>
-        </p:nvSpPr>
-        <p:spPr>
-          <a:xfrm>
-            <a:off x="3009115" y="3442511"/>
-            <a:ext cx="657352" cy="349250"/>
-          </a:xfrm>
-          <a:prstGeom prst="rect">
-            <a:avLst/>
-          </a:prstGeom>
-          <a:noFill/>
-          <a:ln/>
-        </p:spPr>
-        <p:txBody>
-          <a:bodyPr wrap="square" lIns="0" tIns="0" rIns="0" bIns="0" rtlCol="0" anchor="ctr"/>
-          <a:lstStyle/>
-          <a:p>
-            <a:pPr eaLnBrk="0" algn="ctr" indent="0" marL="0">
-              <a:buNone/>
-            </a:pPr>
-            <a:r>
-              <a:rPr lang="ko-KR" altLang="en-US" sz="2200" b="1" dirty="0">
-                <a:solidFill>
-                  <a:srgbClr val="1F2937"/>
-                </a:solidFill>
-                <a:latin typeface="맑은 고딕" pitchFamily="34" charset="0"/>
-                <a:ea typeface="맑은 고딕" pitchFamily="34" charset="-122"/>
-                <a:cs typeface="맑은 고딕" pitchFamily="34" charset="-120"/>
-              </a:rPr>
-              <a:t>높이</a:t>
-            </a:r>
-            <a:endParaRPr lang="ko-KR" sz="2200" dirty="0"/>
-          </a:p>
-        </p:txBody>
-      </p:sp>
-      <p:sp>
-        <p:nvSpPr>
-          <p:cNvPr id="19" name="S07-label140"/>
+          <p:cNvPr id="17" name="S07-label118"/>
           <p:cNvSpPr txBox="1"/>
           <p:nvPr/>
         </p:nvSpPr>
@@ -15969,13 +15366,13 @@
       </p:sp>
       <p:sp>
         <p:nvSpPr>
-          <p:cNvPr id="20" name="S07-label142"/>
+          <p:cNvPr id="18" name="S07-label120"/>
           <p:cNvSpPr txBox="1"/>
           <p:nvPr/>
         </p:nvSpPr>
         <p:spPr>
           <a:xfrm>
-            <a:off x="2147783" y="3739433"/>
+            <a:off x="3309500" y="3442511"/>
             <a:ext cx="657352" cy="349250"/>
           </a:xfrm>
           <a:prstGeom prst="rect">
@@ -16008,7 +15405,7 @@
       </p:sp>
       <p:sp>
         <p:nvSpPr>
-          <p:cNvPr id="21" name="S07-card143"/>
+          <p:cNvPr id="19" name="S07-card121"/>
           <p:cNvSpPr/>
           <p:nvPr/>
         </p:nvSpPr>
@@ -16035,7 +15432,7 @@
       </p:sp>
       <p:sp>
         <p:nvSpPr>
-          <p:cNvPr id="22" name="S07-cardtext144"/>
+          <p:cNvPr id="20" name="S07-cardtext122"/>
           <p:cNvSpPr txBox="1"/>
           <p:nvPr/>
         </p:nvSpPr>
@@ -16077,7 +15474,7 @@
       </p:sp>
       <p:sp>
         <p:nvSpPr>
-          <p:cNvPr id="23" name="S07-card145"/>
+          <p:cNvPr id="21" name="S07-card123"/>
           <p:cNvSpPr/>
           <p:nvPr/>
         </p:nvSpPr>
@@ -16104,7 +15501,7 @@
       </p:sp>
       <p:sp>
         <p:nvSpPr>
-          <p:cNvPr id="24" name="S07-cardtext146"/>
+          <p:cNvPr id="22" name="S07-cardtext124"/>
           <p:cNvSpPr txBox="1"/>
           <p:nvPr/>
         </p:nvSpPr>
@@ -16146,7 +15543,7 @@
       </p:sp>
       <p:sp>
         <p:nvSpPr>
-          <p:cNvPr id="25" name="S07-card147"/>
+          <p:cNvPr id="23" name="S07-card125"/>
           <p:cNvSpPr/>
           <p:nvPr/>
         </p:nvSpPr>
@@ -16173,7 +15570,7 @@
       </p:sp>
       <p:sp>
         <p:nvSpPr>
-          <p:cNvPr id="26" name="S07-cardtext148"/>
+          <p:cNvPr id="24" name="S07-cardtext126"/>
           <p:cNvSpPr txBox="1"/>
           <p:nvPr/>
         </p:nvSpPr>
@@ -16349,7 +15746,7 @@
       </p:sp>
       <p:sp>
         <p:nvSpPr>
-          <p:cNvPr id="3" name="S08-text149"/>
+          <p:cNvPr id="3" name="S08-text127"/>
           <p:cNvSpPr txBox="1"/>
           <p:nvPr/>
         </p:nvSpPr>
@@ -16380,7 +15777,7 @@
                 <a:ea typeface="맑은 고딕" pitchFamily="34" charset="-122"/>
                 <a:cs typeface="맑은 고딕" pitchFamily="34" charset="-120"/>
               </a:rPr>
-              <a:t>규칙을 찾아 빈칸을 채워요.</a:t>
+              <a:t>밑면의 모양에 따라 삼각뿔, 사각뿔 …이에요.</a:t>
             </a:r>
             <a:endParaRPr lang="ko-KR" sz="2800" dirty="0"/>
           </a:p>
@@ -16388,7 +15785,7 @@
       </p:sp>
       <p:sp>
         <p:nvSpPr>
-          <p:cNvPr id="4" name="S08-card150"/>
+          <p:cNvPr id="4" name="S08-card128"/>
           <p:cNvSpPr/>
           <p:nvPr/>
         </p:nvSpPr>
@@ -16415,7 +15812,7 @@
       </p:sp>
       <p:sp>
         <p:nvSpPr>
-          <p:cNvPr id="5" name="S08-cardtext151"/>
+          <p:cNvPr id="5" name="S08-cardtext129"/>
           <p:cNvSpPr txBox="1"/>
           <p:nvPr/>
         </p:nvSpPr>
@@ -16449,7 +15846,7 @@
                 <a:ea typeface="맑은 고딕" pitchFamily="34" charset="-122"/>
                 <a:cs typeface="맑은 고딕" pitchFamily="34" charset="-120"/>
               </a:rPr>
-              <a:t>각기둥의 규칙과 무엇이 다른지 말해요.</a:t>
+              <a:t>규칙을 찾아 빈칸을 채우고, 각기둥과 무엇이 다른지 말해요.</a:t>
             </a:r>
             <a:endParaRPr lang="ko-KR" sz="2800" dirty="0"/>
           </a:p>
@@ -16457,7 +15854,7 @@
       </p:sp>
       <p:graphicFrame>
         <p:nvGraphicFramePr>
-          <p:cNvPr id="9" name="S08-table152"/>
+          <p:cNvPr id="9" name="S08-table130"/>
           <p:cNvGraphicFramePr>
             <a:graphicFrameLocks noGrp="1"/>
           </p:cNvGraphicFramePr>
@@ -18303,14 +17700,14 @@
       </p:sp>
       <p:sp>
         <p:nvSpPr>
-          <p:cNvPr id="3" name="S09-figure153" descr="눕혀 놓은 삼각기둥: 앞 삼각형 면 가(색칠), 오른쪽 위 직사각형 면 나, 바닥에 닿은 직사각형 면 다"/>
-          <p:cNvSpPr/>
-          <p:nvPr/>
-        </p:nvSpPr>
-        <p:spPr>
-          <a:xfrm>
-            <a:off x="6893662" y="3330702"/>
-            <a:ext cx="2743200" cy="1463040"/>
+          <p:cNvPr id="3" name="S09-figure131" descr="눕혀 놓은 삼각기둥: 앞 삼각형 면 가(색칠), 오른쪽 위 직사각형 면 나, 바닥에 닿은 직사각형 면 다"/>
+          <p:cNvSpPr/>
+          <p:nvPr/>
+        </p:nvSpPr>
+        <p:spPr>
+          <a:xfrm>
+            <a:off x="6893662" y="3239262"/>
+            <a:ext cx="2743200" cy="1645920"/>
           </a:xfrm>
           <a:custGeom>
             <a:avLst/>
@@ -18319,15 +17716,15 @@
             <a:cxnLst/>
             <a:rect l="l" t="t" r="r" b="b"/>
             <a:pathLst>
-              <a:path w="2743200" h="1463040">
+              <a:path w="2743200" h="1645920">
                 <a:moveTo>
-                  <a:pt x="0" y="1463040"/>
+                  <a:pt x="0" y="1645920"/>
                 </a:moveTo>
                 <a:lnTo>
-                  <a:pt x="2743200" y="1463040"/>
+                  <a:pt x="2743200" y="1645920"/>
                 </a:lnTo>
                 <a:lnTo>
-                  <a:pt x="2194560" y="0"/>
+                  <a:pt x="1371600" y="0"/>
                 </a:lnTo>
                 <a:close/>
               </a:path>
@@ -18346,13 +17743,13 @@
       </p:sp>
       <p:sp>
         <p:nvSpPr>
-          <p:cNvPr id="4" name="S09-mark154"/>
-          <p:cNvSpPr/>
-          <p:nvPr/>
-        </p:nvSpPr>
-        <p:spPr>
-          <a:xfrm>
-            <a:off x="8280806" y="3710178"/>
+          <p:cNvPr id="4" name="S09-mark132"/>
+          <p:cNvSpPr/>
+          <p:nvPr/>
+        </p:nvSpPr>
+        <p:spPr>
+          <a:xfrm>
+            <a:off x="8280806" y="3801618"/>
             <a:ext cx="2743200" cy="0"/>
           </a:xfrm>
           <a:prstGeom prst="line">
@@ -18369,13 +17766,59 @@
       </p:sp>
       <p:sp>
         <p:nvSpPr>
-          <p:cNvPr id="5" name="S09-mark155"/>
-          <p:cNvSpPr/>
-          <p:nvPr/>
-        </p:nvSpPr>
-        <p:spPr>
-          <a:xfrm>
-            <a:off x="6893662" y="4793742"/>
+          <p:cNvPr id="5" name="S09-mark133"/>
+          <p:cNvSpPr/>
+          <p:nvPr/>
+        </p:nvSpPr>
+        <p:spPr>
+          <a:xfrm flipV="1">
+            <a:off x="8280806" y="2155698"/>
+            <a:ext cx="1371600" cy="1645920"/>
+          </a:xfrm>
+          <a:prstGeom prst="line">
+            <a:avLst/>
+          </a:prstGeom>
+          <a:noFill/>
+          <a:ln w="22225">
+            <a:solidFill>
+              <a:srgbClr val="1F2937"/>
+            </a:solidFill>
+            <a:prstDash val="dash"/>
+          </a:ln>
+        </p:spPr>
+      </p:sp>
+      <p:sp>
+        <p:nvSpPr>
+          <p:cNvPr id="6" name="S09-mark134"/>
+          <p:cNvSpPr/>
+          <p:nvPr/>
+        </p:nvSpPr>
+        <p:spPr>
+          <a:xfrm flipV="1">
+            <a:off x="6893662" y="3801618"/>
+            <a:ext cx="1387145" cy="1083564"/>
+          </a:xfrm>
+          <a:prstGeom prst="line">
+            <a:avLst/>
+          </a:prstGeom>
+          <a:noFill/>
+          <a:ln w="22225">
+            <a:solidFill>
+              <a:srgbClr val="1F2937"/>
+            </a:solidFill>
+            <a:prstDash val="dash"/>
+          </a:ln>
+        </p:spPr>
+      </p:sp>
+      <p:sp>
+        <p:nvSpPr>
+          <p:cNvPr id="7" name="S09-mark135"/>
+          <p:cNvSpPr/>
+          <p:nvPr/>
+        </p:nvSpPr>
+        <p:spPr>
+          <a:xfrm>
+            <a:off x="6893662" y="4885182"/>
             <a:ext cx="2743200" cy="0"/>
           </a:xfrm>
           <a:prstGeom prst="line">
@@ -18392,14 +17835,14 @@
       </p:sp>
       <p:sp>
         <p:nvSpPr>
-          <p:cNvPr id="6" name="S09-mark156"/>
+          <p:cNvPr id="8" name="S09-mark136"/>
           <p:cNvSpPr/>
           <p:nvPr/>
         </p:nvSpPr>
         <p:spPr>
           <a:xfrm flipH="1" flipV="1">
-            <a:off x="9088222" y="3330702"/>
-            <a:ext cx="548640" cy="1463040"/>
+            <a:off x="8265262" y="3239262"/>
+            <a:ext cx="1371600" cy="1645920"/>
           </a:xfrm>
           <a:prstGeom prst="line">
             <a:avLst/>
@@ -18415,14 +17858,14 @@
       </p:sp>
       <p:sp>
         <p:nvSpPr>
-          <p:cNvPr id="7" name="S09-mark157"/>
+          <p:cNvPr id="9" name="S09-mark137"/>
           <p:cNvSpPr/>
           <p:nvPr/>
         </p:nvSpPr>
         <p:spPr>
           <a:xfrm flipV="1">
-            <a:off x="6893662" y="3330702"/>
-            <a:ext cx="2194560" cy="1463040"/>
+            <a:off x="6893662" y="3239262"/>
+            <a:ext cx="1371600" cy="1645920"/>
           </a:xfrm>
           <a:prstGeom prst="line">
             <a:avLst/>
@@ -18438,14 +17881,14 @@
       </p:sp>
       <p:sp>
         <p:nvSpPr>
-          <p:cNvPr id="8" name="S09-mark158"/>
+          <p:cNvPr id="10" name="S09-mark138"/>
           <p:cNvSpPr/>
           <p:nvPr/>
         </p:nvSpPr>
         <p:spPr>
           <a:xfrm flipH="1" flipV="1">
-            <a:off x="10475366" y="2247138"/>
-            <a:ext cx="548640" cy="1463040"/>
+            <a:off x="9652406" y="2155698"/>
+            <a:ext cx="1371600" cy="1645920"/>
           </a:xfrm>
           <a:prstGeom prst="line">
             <a:avLst/>
@@ -18461,14 +17904,14 @@
       </p:sp>
       <p:sp>
         <p:nvSpPr>
-          <p:cNvPr id="9" name="S09-mark159"/>
+          <p:cNvPr id="11" name="S09-mark139"/>
           <p:cNvSpPr/>
           <p:nvPr/>
         </p:nvSpPr>
         <p:spPr>
           <a:xfrm flipV="1">
-            <a:off x="8280806" y="2247138"/>
-            <a:ext cx="2194560" cy="1463040"/>
+            <a:off x="9636862" y="3801618"/>
+            <a:ext cx="1387145" cy="1083564"/>
           </a:xfrm>
           <a:prstGeom prst="line">
             <a:avLst/>
@@ -18484,13 +17927,13 @@
       </p:sp>
       <p:sp>
         <p:nvSpPr>
-          <p:cNvPr id="10" name="S09-mark160"/>
+          <p:cNvPr id="12" name="S09-mark140"/>
           <p:cNvSpPr/>
           <p:nvPr/>
         </p:nvSpPr>
         <p:spPr>
           <a:xfrm flipV="1">
-            <a:off x="9636862" y="3710178"/>
+            <a:off x="8265262" y="2155698"/>
             <a:ext cx="1387145" cy="1083564"/>
           </a:xfrm>
           <a:prstGeom prst="line">
@@ -18507,59 +17950,13 @@
       </p:sp>
       <p:sp>
         <p:nvSpPr>
-          <p:cNvPr id="11" name="S09-mark161"/>
-          <p:cNvSpPr/>
-          <p:nvPr/>
-        </p:nvSpPr>
-        <p:spPr>
-          <a:xfrm flipV="1">
-            <a:off x="6893662" y="3710178"/>
-            <a:ext cx="1387145" cy="1083564"/>
-          </a:xfrm>
-          <a:prstGeom prst="line">
-            <a:avLst/>
-          </a:prstGeom>
-          <a:noFill/>
-          <a:ln w="28575">
-            <a:solidFill>
-              <a:srgbClr val="1F2937"/>
-            </a:solidFill>
-            <a:prstDash val="solid"/>
-          </a:ln>
-        </p:spPr>
-      </p:sp>
-      <p:sp>
-        <p:nvSpPr>
-          <p:cNvPr id="12" name="S09-mark162"/>
-          <p:cNvSpPr/>
-          <p:nvPr/>
-        </p:nvSpPr>
-        <p:spPr>
-          <a:xfrm flipV="1">
-            <a:off x="9088222" y="2247138"/>
-            <a:ext cx="1387145" cy="1083564"/>
-          </a:xfrm>
-          <a:prstGeom prst="line">
-            <a:avLst/>
-          </a:prstGeom>
-          <a:noFill/>
-          <a:ln w="28575">
-            <a:solidFill>
-              <a:srgbClr val="1F2937"/>
-            </a:solidFill>
-            <a:prstDash val="solid"/>
-          </a:ln>
-        </p:spPr>
-      </p:sp>
-      <p:sp>
-        <p:nvSpPr>
-          <p:cNvPr id="13" name="S09-label164"/>
+          <p:cNvPr id="13" name="S09-label142"/>
           <p:cNvSpPr txBox="1"/>
           <p:nvPr/>
         </p:nvSpPr>
         <p:spPr>
           <a:xfrm>
-            <a:off x="8347812" y="4131742"/>
+            <a:off x="8073492" y="4161917"/>
             <a:ext cx="383540" cy="349250"/>
           </a:xfrm>
           <a:prstGeom prst="rect">
@@ -18592,13 +17989,13 @@
       </p:sp>
       <p:sp>
         <p:nvSpPr>
-          <p:cNvPr id="14" name="S09-label166"/>
+          <p:cNvPr id="14" name="S09-label144"/>
           <p:cNvSpPr txBox="1"/>
           <p:nvPr/>
         </p:nvSpPr>
         <p:spPr>
           <a:xfrm>
-            <a:off x="9863887" y="3345358"/>
+            <a:off x="9636201" y="2934792"/>
             <a:ext cx="383540" cy="349250"/>
           </a:xfrm>
           <a:prstGeom prst="rect">
@@ -18631,13 +18028,13 @@
       </p:sp>
       <p:sp>
         <p:nvSpPr>
-          <p:cNvPr id="15" name="S09-label168"/>
+          <p:cNvPr id="15" name="S09-label146"/>
           <p:cNvSpPr txBox="1"/>
           <p:nvPr/>
         </p:nvSpPr>
         <p:spPr>
           <a:xfrm>
-            <a:off x="7997800" y="5122037"/>
+            <a:off x="8272120" y="5213477"/>
             <a:ext cx="1266444" cy="349250"/>
           </a:xfrm>
           <a:prstGeom prst="rect">
@@ -18670,7 +18067,7 @@
       </p:sp>
       <p:sp>
         <p:nvSpPr>
-          <p:cNvPr id="16" name="S09-chip169"/>
+          <p:cNvPr id="16" name="S09-chip147"/>
           <p:cNvSpPr txBox="1"/>
           <p:nvPr/>
         </p:nvSpPr>
@@ -18717,7 +18114,7 @@
       </p:sp>
       <p:sp>
         <p:nvSpPr>
-          <p:cNvPr id="17" name="S09-text170"/>
+          <p:cNvPr id="17" name="S09-text148"/>
           <p:cNvSpPr txBox="1"/>
           <p:nvPr/>
         </p:nvSpPr>
@@ -18773,7 +18170,7 @@
       </p:sp>
       <p:sp>
         <p:nvSpPr>
-          <p:cNvPr id="18" name="S09-chip171"/>
+          <p:cNvPr id="18" name="S09-chip149"/>
           <p:cNvSpPr txBox="1"/>
           <p:nvPr/>
         </p:nvSpPr>
@@ -18820,7 +18217,7 @@
       </p:sp>
       <p:sp>
         <p:nvSpPr>
-          <p:cNvPr id="19" name="S09-text172"/>
+          <p:cNvPr id="19" name="S09-text150"/>
           <p:cNvSpPr txBox="1"/>
           <p:nvPr/>
         </p:nvSpPr>
@@ -18876,7 +18273,7 @@
       </p:sp>
       <p:sp>
         <p:nvSpPr>
-          <p:cNvPr id="20" name="S09-chip173"/>
+          <p:cNvPr id="20" name="S09-chip151"/>
           <p:cNvSpPr txBox="1"/>
           <p:nvPr/>
         </p:nvSpPr>
@@ -18923,7 +18320,7 @@
       </p:sp>
       <p:sp>
         <p:nvSpPr>
-          <p:cNvPr id="21" name="S09-text174"/>
+          <p:cNvPr id="21" name="S09-text152"/>
           <p:cNvSpPr txBox="1"/>
           <p:nvPr/>
         </p:nvSpPr>
